--- a/demo/ACBF_Panel_Editor_Demo.pptx
+++ b/demo/ACBF_Panel_Editor_Demo.pptx
@@ -3088,6 +3088,14 @@
 <file path=ppt/slides/slide1.xml><?xml version="1.0" encoding="utf-8"?>
 <p:sld xmlns:a="http://schemas.openxmlformats.org/drawingml/2006/main" xmlns:p="http://schemas.openxmlformats.org/presentationml/2006/main" xmlns:r="http://schemas.openxmlformats.org/officeDocument/2006/relationships">
   <p:cSld>
+    <p:bg>
+      <p:bgPr>
+        <a:solidFill>
+          <a:srgbClr val="17140F"/>
+        </a:solidFill>
+        <a:effectLst/>
+      </p:bgPr>
+    </p:bg>
     <p:spTree>
       <p:nvGrpSpPr>
         <p:cNvPr id="1" name=""/>
@@ -3095,30 +3103,616 @@
         <p:nvPr/>
       </p:nvGrpSpPr>
       <p:grpSpPr/>
-      <p:pic>
-        <p:nvPicPr>
-          <p:cNvPr id="2" name="Picture 1" descr="slide-01.png"/>
-          <p:cNvPicPr>
-            <a:picLocks noChangeAspect="1"/>
-          </p:cNvPicPr>
-          <p:nvPr/>
-        </p:nvPicPr>
-        <p:blipFill>
-          <a:blip r:embed="rId2"/>
-          <a:stretch>
-            <a:fillRect/>
-          </a:stretch>
-        </p:blipFill>
-        <p:spPr>
-          <a:xfrm>
-            <a:off x="0" y="0"/>
-            <a:ext cx="12191695" cy="6858000"/>
-          </a:xfrm>
-          <a:prstGeom prst="rect">
-            <a:avLst/>
-          </a:prstGeom>
-        </p:spPr>
-      </p:pic>
+      <p:sp>
+        <p:nvSpPr>
+          <p:cNvPr id="2" name="Rounded Rectangle 1"/>
+          <p:cNvSpPr/>
+          <p:nvPr/>
+        </p:nvSpPr>
+        <p:spPr>
+          <a:xfrm rot="21360000">
+            <a:off x="8138160" y="1417320"/>
+            <a:ext cx="3657600" cy="1737360"/>
+          </a:xfrm>
+          <a:prstGeom prst="roundRect">
+            <a:avLst>
+              <a:gd name="adj" fmla="val 6000"/>
+            </a:avLst>
+          </a:prstGeom>
+          <a:solidFill>
+            <a:srgbClr val="211C15"/>
+          </a:solidFill>
+          <a:ln w="15240">
+            <a:solidFill>
+              <a:srgbClr val="362D1E"/>
+            </a:solidFill>
+          </a:ln>
+          <a:effectLst/>
+        </p:spPr>
+        <p:style>
+          <a:lnRef idx="1">
+            <a:schemeClr val="accent1"/>
+          </a:lnRef>
+          <a:fillRef idx="3">
+            <a:schemeClr val="accent1"/>
+          </a:fillRef>
+          <a:effectRef idx="2">
+            <a:schemeClr val="accent1"/>
+          </a:effectRef>
+          <a:fontRef idx="minor">
+            <a:schemeClr val="lt1"/>
+          </a:fontRef>
+        </p:style>
+        <p:txBody>
+          <a:bodyPr rtlCol="0" anchor="ctr"/>
+          <a:lstStyle/>
+          <a:p>
+            <a:pPr algn="ctr"/>
+          </a:p>
+        </p:txBody>
+      </p:sp>
+      <p:sp>
+        <p:nvSpPr>
+          <p:cNvPr id="3" name="Rounded Rectangle 2"/>
+          <p:cNvSpPr/>
+          <p:nvPr/>
+        </p:nvSpPr>
+        <p:spPr>
+          <a:xfrm rot="180000">
+            <a:off x="8778240" y="3063240"/>
+            <a:ext cx="3657600" cy="1645920"/>
+          </a:xfrm>
+          <a:prstGeom prst="roundRect">
+            <a:avLst>
+              <a:gd name="adj" fmla="val 6000"/>
+            </a:avLst>
+          </a:prstGeom>
+          <a:solidFill>
+            <a:srgbClr val="211C15"/>
+          </a:solidFill>
+          <a:ln w="15240">
+            <a:solidFill>
+              <a:srgbClr val="362D1E"/>
+            </a:solidFill>
+          </a:ln>
+          <a:effectLst/>
+        </p:spPr>
+        <p:style>
+          <a:lnRef idx="1">
+            <a:schemeClr val="accent1"/>
+          </a:lnRef>
+          <a:fillRef idx="3">
+            <a:schemeClr val="accent1"/>
+          </a:fillRef>
+          <a:effectRef idx="2">
+            <a:schemeClr val="accent1"/>
+          </a:effectRef>
+          <a:fontRef idx="minor">
+            <a:schemeClr val="lt1"/>
+          </a:fontRef>
+        </p:style>
+        <p:txBody>
+          <a:bodyPr rtlCol="0" anchor="ctr"/>
+          <a:lstStyle/>
+          <a:p>
+            <a:pPr algn="ctr"/>
+          </a:p>
+        </p:txBody>
+      </p:sp>
+      <p:sp>
+        <p:nvSpPr>
+          <p:cNvPr id="4" name="Rounded Rectangle 3"/>
+          <p:cNvSpPr/>
+          <p:nvPr/>
+        </p:nvSpPr>
+        <p:spPr>
+          <a:xfrm>
+            <a:off x="8549640" y="4434840"/>
+            <a:ext cx="3566160" cy="1600200"/>
+          </a:xfrm>
+          <a:prstGeom prst="roundRect">
+            <a:avLst>
+              <a:gd name="adj" fmla="val 6000"/>
+            </a:avLst>
+          </a:prstGeom>
+          <a:solidFill>
+            <a:srgbClr val="211C15"/>
+          </a:solidFill>
+          <a:ln w="15240">
+            <a:solidFill>
+              <a:srgbClr val="362D1E"/>
+            </a:solidFill>
+          </a:ln>
+          <a:effectLst/>
+        </p:spPr>
+        <p:style>
+          <a:lnRef idx="1">
+            <a:schemeClr val="accent1"/>
+          </a:lnRef>
+          <a:fillRef idx="3">
+            <a:schemeClr val="accent1"/>
+          </a:fillRef>
+          <a:effectRef idx="2">
+            <a:schemeClr val="accent1"/>
+          </a:effectRef>
+          <a:fontRef idx="minor">
+            <a:schemeClr val="lt1"/>
+          </a:fontRef>
+        </p:style>
+        <p:txBody>
+          <a:bodyPr rtlCol="0" anchor="ctr"/>
+          <a:lstStyle/>
+          <a:p>
+            <a:pPr algn="ctr"/>
+          </a:p>
+        </p:txBody>
+      </p:sp>
+      <p:sp>
+        <p:nvSpPr>
+          <p:cNvPr id="5" name="TextBox 4"/>
+          <p:cNvSpPr txBox="1"/>
+          <p:nvPr/>
+        </p:nvSpPr>
+        <p:spPr>
+          <a:xfrm>
+            <a:off x="685800" y="502920"/>
+            <a:ext cx="7315200" cy="320040"/>
+          </a:xfrm>
+          <a:prstGeom prst="rect">
+            <a:avLst/>
+          </a:prstGeom>
+          <a:noFill/>
+        </p:spPr>
+        <p:txBody>
+          <a:bodyPr wrap="square" anchor="t" lIns="0" rIns="0" tIns="0" bIns="0">
+            <a:spAutoFit/>
+          </a:bodyPr>
+          <a:lstStyle/>
+          <a:p>
+            <a:pPr algn="l">
+              <a:lnSpc>
+                <a:spcPct val="120000"/>
+              </a:lnSpc>
+            </a:pPr>
+            <a:r>
+              <a:rPr sz="1200" b="0" i="0" spc="120">
+                <a:solidFill>
+                  <a:srgbClr val="6FB7D9"/>
+                </a:solidFill>
+                <a:latin typeface="Consolas"/>
+              </a:rPr>
+              <a:t>LIVE DEMO — FOR COMIC PUBLISHERS</a:t>
+            </a:r>
+          </a:p>
+        </p:txBody>
+      </p:sp>
+      <p:sp>
+        <p:nvSpPr>
+          <p:cNvPr id="6" name="TextBox 5"/>
+          <p:cNvSpPr txBox="1"/>
+          <p:nvPr/>
+        </p:nvSpPr>
+        <p:spPr>
+          <a:xfrm>
+            <a:off x="685800" y="960120"/>
+            <a:ext cx="6400800" cy="1737360"/>
+          </a:xfrm>
+          <a:prstGeom prst="rect">
+            <a:avLst/>
+          </a:prstGeom>
+          <a:noFill/>
+        </p:spPr>
+        <p:txBody>
+          <a:bodyPr wrap="square" anchor="t" lIns="0" rIns="0" tIns="0" bIns="0">
+            <a:spAutoFit/>
+          </a:bodyPr>
+          <a:lstStyle/>
+          <a:p>
+            <a:pPr algn="l">
+              <a:lnSpc>
+                <a:spcPct val="100000"/>
+              </a:lnSpc>
+            </a:pPr>
+            <a:r>
+              <a:rPr sz="4600" b="0" i="0">
+                <a:solidFill>
+                  <a:srgbClr val="F4C563"/>
+                </a:solidFill>
+                <a:latin typeface="Arial Black"/>
+              </a:rPr>
+              <a:t>ACBF</a:t>
+            </a:r>
+          </a:p>
+          <a:p>
+            <a:pPr algn="l">
+              <a:lnSpc>
+                <a:spcPct val="100000"/>
+              </a:lnSpc>
+            </a:pPr>
+            <a:r>
+              <a:rPr sz="4600" b="0" i="0">
+                <a:solidFill>
+                  <a:srgbClr val="F4C563"/>
+                </a:solidFill>
+                <a:latin typeface="Arial Black"/>
+              </a:rPr>
+              <a:t>PANEL EDITOR</a:t>
+            </a:r>
+          </a:p>
+        </p:txBody>
+      </p:sp>
+      <p:sp>
+        <p:nvSpPr>
+          <p:cNvPr id="7" name="TextBox 6"/>
+          <p:cNvSpPr txBox="1"/>
+          <p:nvPr/>
+        </p:nvSpPr>
+        <p:spPr>
+          <a:xfrm>
+            <a:off x="685800" y="2697480"/>
+            <a:ext cx="5760720" cy="1005840"/>
+          </a:xfrm>
+          <a:prstGeom prst="rect">
+            <a:avLst/>
+          </a:prstGeom>
+          <a:noFill/>
+        </p:spPr>
+        <p:txBody>
+          <a:bodyPr wrap="square" anchor="t" lIns="0" rIns="0" tIns="0" bIns="0">
+            <a:spAutoFit/>
+          </a:bodyPr>
+          <a:lstStyle/>
+          <a:p>
+            <a:pPr algn="l">
+              <a:lnSpc>
+                <a:spcPct val="130000"/>
+              </a:lnSpc>
+            </a:pPr>
+            <a:r>
+              <a:rPr sz="1700" b="0" i="0">
+                <a:solidFill>
+                  <a:srgbClr val="F5EFE2"/>
+                </a:solidFill>
+                <a:latin typeface="Calibri"/>
+              </a:rPr>
+              <a:t>Turning a comic archive into a panel-by-panel reading experience — without redrawing a single page.</a:t>
+            </a:r>
+          </a:p>
+        </p:txBody>
+      </p:sp>
+      <p:sp>
+        <p:nvSpPr>
+          <p:cNvPr id="8" name="Rounded Rectangle 7"/>
+          <p:cNvSpPr/>
+          <p:nvPr/>
+        </p:nvSpPr>
+        <p:spPr>
+          <a:xfrm>
+            <a:off x="685800" y="5989320"/>
+            <a:ext cx="758952" cy="384048"/>
+          </a:xfrm>
+          <a:prstGeom prst="roundRect">
+            <a:avLst>
+              <a:gd name="adj" fmla="val 25000"/>
+            </a:avLst>
+          </a:prstGeom>
+          <a:noFill/>
+          <a:ln w="12700">
+            <a:solidFill>
+              <a:srgbClr val="3A3225"/>
+            </a:solidFill>
+          </a:ln>
+          <a:effectLst/>
+        </p:spPr>
+        <p:style>
+          <a:lnRef idx="1">
+            <a:schemeClr val="accent1"/>
+          </a:lnRef>
+          <a:fillRef idx="3">
+            <a:schemeClr val="accent1"/>
+          </a:fillRef>
+          <a:effectRef idx="2">
+            <a:schemeClr val="accent1"/>
+          </a:effectRef>
+          <a:fontRef idx="minor">
+            <a:schemeClr val="lt1"/>
+          </a:fontRef>
+        </p:style>
+        <p:txBody>
+          <a:bodyPr rtlCol="0" anchor="ctr"/>
+          <a:lstStyle/>
+          <a:p>
+            <a:pPr algn="ctr"/>
+          </a:p>
+        </p:txBody>
+      </p:sp>
+      <p:sp>
+        <p:nvSpPr>
+          <p:cNvPr id="9" name="TextBox 8"/>
+          <p:cNvSpPr txBox="1"/>
+          <p:nvPr/>
+        </p:nvSpPr>
+        <p:spPr>
+          <a:xfrm>
+            <a:off x="685800" y="6044183"/>
+            <a:ext cx="758952" cy="274320"/>
+          </a:xfrm>
+          <a:prstGeom prst="rect">
+            <a:avLst/>
+          </a:prstGeom>
+          <a:noFill/>
+        </p:spPr>
+        <p:txBody>
+          <a:bodyPr wrap="square" anchor="t" lIns="0" rIns="0" tIns="0" bIns="0">
+            <a:spAutoFit/>
+          </a:bodyPr>
+          <a:lstStyle/>
+          <a:p>
+            <a:pPr algn="ctr">
+              <a:lnSpc>
+                <a:spcPct val="120000"/>
+              </a:lnSpc>
+            </a:pPr>
+            <a:r>
+              <a:rPr sz="1200" b="0" i="0">
+                <a:solidFill>
+                  <a:srgbClr val="6FB7D9"/>
+                </a:solidFill>
+                <a:latin typeface="Consolas"/>
+              </a:rPr>
+              <a:t>.CBZ</a:t>
+            </a:r>
+          </a:p>
+        </p:txBody>
+      </p:sp>
+      <p:sp>
+        <p:nvSpPr>
+          <p:cNvPr id="10" name="TextBox 9"/>
+          <p:cNvSpPr txBox="1"/>
+          <p:nvPr/>
+        </p:nvSpPr>
+        <p:spPr>
+          <a:xfrm>
+            <a:off x="1581912" y="6044183"/>
+            <a:ext cx="429768" cy="274320"/>
+          </a:xfrm>
+          <a:prstGeom prst="rect">
+            <a:avLst/>
+          </a:prstGeom>
+          <a:noFill/>
+        </p:spPr>
+        <p:txBody>
+          <a:bodyPr wrap="square" anchor="t" lIns="0" rIns="0" tIns="0" bIns="0">
+            <a:spAutoFit/>
+          </a:bodyPr>
+          <a:lstStyle/>
+          <a:p>
+            <a:pPr algn="ctr">
+              <a:lnSpc>
+                <a:spcPct val="120000"/>
+              </a:lnSpc>
+            </a:pPr>
+            <a:r>
+              <a:rPr sz="1200" b="0" i="0">
+                <a:solidFill>
+                  <a:srgbClr val="A79A85"/>
+                </a:solidFill>
+                <a:latin typeface="Consolas"/>
+              </a:rPr>
+              <a:t>/</a:t>
+            </a:r>
+          </a:p>
+        </p:txBody>
+      </p:sp>
+      <p:sp>
+        <p:nvSpPr>
+          <p:cNvPr id="11" name="Rounded Rectangle 10"/>
+          <p:cNvSpPr/>
+          <p:nvPr/>
+        </p:nvSpPr>
+        <p:spPr>
+          <a:xfrm>
+            <a:off x="2148840" y="5989320"/>
+            <a:ext cx="758952" cy="384048"/>
+          </a:xfrm>
+          <a:prstGeom prst="roundRect">
+            <a:avLst>
+              <a:gd name="adj" fmla="val 25000"/>
+            </a:avLst>
+          </a:prstGeom>
+          <a:noFill/>
+          <a:ln w="12700">
+            <a:solidFill>
+              <a:srgbClr val="3A3225"/>
+            </a:solidFill>
+          </a:ln>
+          <a:effectLst/>
+        </p:spPr>
+        <p:style>
+          <a:lnRef idx="1">
+            <a:schemeClr val="accent1"/>
+          </a:lnRef>
+          <a:fillRef idx="3">
+            <a:schemeClr val="accent1"/>
+          </a:fillRef>
+          <a:effectRef idx="2">
+            <a:schemeClr val="accent1"/>
+          </a:effectRef>
+          <a:fontRef idx="minor">
+            <a:schemeClr val="lt1"/>
+          </a:fontRef>
+        </p:style>
+        <p:txBody>
+          <a:bodyPr rtlCol="0" anchor="ctr"/>
+          <a:lstStyle/>
+          <a:p>
+            <a:pPr algn="ctr"/>
+          </a:p>
+        </p:txBody>
+      </p:sp>
+      <p:sp>
+        <p:nvSpPr>
+          <p:cNvPr id="12" name="TextBox 11"/>
+          <p:cNvSpPr txBox="1"/>
+          <p:nvPr/>
+        </p:nvSpPr>
+        <p:spPr>
+          <a:xfrm>
+            <a:off x="2148840" y="6044183"/>
+            <a:ext cx="758952" cy="274320"/>
+          </a:xfrm>
+          <a:prstGeom prst="rect">
+            <a:avLst/>
+          </a:prstGeom>
+          <a:noFill/>
+        </p:spPr>
+        <p:txBody>
+          <a:bodyPr wrap="square" anchor="t" lIns="0" rIns="0" tIns="0" bIns="0">
+            <a:spAutoFit/>
+          </a:bodyPr>
+          <a:lstStyle/>
+          <a:p>
+            <a:pPr algn="ctr">
+              <a:lnSpc>
+                <a:spcPct val="120000"/>
+              </a:lnSpc>
+            </a:pPr>
+            <a:r>
+              <a:rPr sz="1200" b="0" i="0">
+                <a:solidFill>
+                  <a:srgbClr val="6FB7D9"/>
+                </a:solidFill>
+                <a:latin typeface="Consolas"/>
+              </a:rPr>
+              <a:t>.CBR</a:t>
+            </a:r>
+          </a:p>
+        </p:txBody>
+      </p:sp>
+      <p:sp>
+        <p:nvSpPr>
+          <p:cNvPr id="13" name="TextBox 12"/>
+          <p:cNvSpPr txBox="1"/>
+          <p:nvPr/>
+        </p:nvSpPr>
+        <p:spPr>
+          <a:xfrm>
+            <a:off x="3044952" y="6044183"/>
+            <a:ext cx="1417319" cy="274320"/>
+          </a:xfrm>
+          <a:prstGeom prst="rect">
+            <a:avLst/>
+          </a:prstGeom>
+          <a:noFill/>
+        </p:spPr>
+        <p:txBody>
+          <a:bodyPr wrap="square" anchor="t" lIns="0" rIns="0" tIns="0" bIns="0">
+            <a:spAutoFit/>
+          </a:bodyPr>
+          <a:lstStyle/>
+          <a:p>
+            <a:pPr algn="ctr">
+              <a:lnSpc>
+                <a:spcPct val="120000"/>
+              </a:lnSpc>
+            </a:pPr>
+            <a:r>
+              <a:rPr sz="1200" b="0" i="0">
+                <a:solidFill>
+                  <a:srgbClr val="A79A85"/>
+                </a:solidFill>
+                <a:latin typeface="Consolas"/>
+              </a:rPr>
+              <a:t>→ editor →</a:t>
+            </a:r>
+          </a:p>
+        </p:txBody>
+      </p:sp>
+      <p:sp>
+        <p:nvSpPr>
+          <p:cNvPr id="14" name="Rounded Rectangle 13"/>
+          <p:cNvSpPr/>
+          <p:nvPr/>
+        </p:nvSpPr>
+        <p:spPr>
+          <a:xfrm>
+            <a:off x="4599431" y="5989320"/>
+            <a:ext cx="868680" cy="384048"/>
+          </a:xfrm>
+          <a:prstGeom prst="roundRect">
+            <a:avLst>
+              <a:gd name="adj" fmla="val 25000"/>
+            </a:avLst>
+          </a:prstGeom>
+          <a:noFill/>
+          <a:ln w="12700">
+            <a:solidFill>
+              <a:srgbClr val="E8A93C"/>
+            </a:solidFill>
+          </a:ln>
+          <a:effectLst/>
+        </p:spPr>
+        <p:style>
+          <a:lnRef idx="1">
+            <a:schemeClr val="accent1"/>
+          </a:lnRef>
+          <a:fillRef idx="3">
+            <a:schemeClr val="accent1"/>
+          </a:fillRef>
+          <a:effectRef idx="2">
+            <a:schemeClr val="accent1"/>
+          </a:effectRef>
+          <a:fontRef idx="minor">
+            <a:schemeClr val="lt1"/>
+          </a:fontRef>
+        </p:style>
+        <p:txBody>
+          <a:bodyPr rtlCol="0" anchor="ctr"/>
+          <a:lstStyle/>
+          <a:p>
+            <a:pPr algn="ctr"/>
+          </a:p>
+        </p:txBody>
+      </p:sp>
+      <p:sp>
+        <p:nvSpPr>
+          <p:cNvPr id="15" name="TextBox 14"/>
+          <p:cNvSpPr txBox="1"/>
+          <p:nvPr/>
+        </p:nvSpPr>
+        <p:spPr>
+          <a:xfrm>
+            <a:off x="4599431" y="6044183"/>
+            <a:ext cx="868680" cy="274320"/>
+          </a:xfrm>
+          <a:prstGeom prst="rect">
+            <a:avLst/>
+          </a:prstGeom>
+          <a:noFill/>
+        </p:spPr>
+        <p:txBody>
+          <a:bodyPr wrap="square" anchor="t" lIns="0" rIns="0" tIns="0" bIns="0">
+            <a:spAutoFit/>
+          </a:bodyPr>
+          <a:lstStyle/>
+          <a:p>
+            <a:pPr algn="ctr">
+              <a:lnSpc>
+                <a:spcPct val="120000"/>
+              </a:lnSpc>
+            </a:pPr>
+            <a:r>
+              <a:rPr sz="1200" b="0" i="0">
+                <a:solidFill>
+                  <a:srgbClr val="E8A93C"/>
+                </a:solidFill>
+                <a:latin typeface="Consolas"/>
+              </a:rPr>
+              <a:t>.ACBF</a:t>
+            </a:r>
+          </a:p>
+        </p:txBody>
+      </p:sp>
     </p:spTree>
   </p:cSld>
   <p:clrMapOvr>
@@ -3130,6 +3724,14 @@
 <file path=ppt/slides/slide2.xml><?xml version="1.0" encoding="utf-8"?>
 <p:sld xmlns:a="http://schemas.openxmlformats.org/drawingml/2006/main" xmlns:p="http://schemas.openxmlformats.org/presentationml/2006/main" xmlns:r="http://schemas.openxmlformats.org/officeDocument/2006/relationships">
   <p:cSld>
+    <p:bg>
+      <p:bgPr>
+        <a:solidFill>
+          <a:srgbClr val="17140F"/>
+        </a:solidFill>
+        <a:effectLst/>
+      </p:bgPr>
+    </p:bg>
     <p:spTree>
       <p:nvGrpSpPr>
         <p:cNvPr id="1" name=""/>
@@ -3137,30 +3739,696 @@
         <p:nvPr/>
       </p:nvGrpSpPr>
       <p:grpSpPr/>
-      <p:pic>
-        <p:nvPicPr>
-          <p:cNvPr id="2" name="Picture 1" descr="slide-02.png"/>
-          <p:cNvPicPr>
-            <a:picLocks noChangeAspect="1"/>
-          </p:cNvPicPr>
-          <p:nvPr/>
-        </p:nvPicPr>
-        <p:blipFill>
-          <a:blip r:embed="rId2"/>
-          <a:stretch>
-            <a:fillRect/>
-          </a:stretch>
-        </p:blipFill>
-        <p:spPr>
-          <a:xfrm>
-            <a:off x="0" y="0"/>
-            <a:ext cx="12191695" cy="6858000"/>
-          </a:xfrm>
-          <a:prstGeom prst="rect">
-            <a:avLst/>
-          </a:prstGeom>
-        </p:spPr>
-      </p:pic>
+      <p:sp>
+        <p:nvSpPr>
+          <p:cNvPr id="2" name="TextBox 1"/>
+          <p:cNvSpPr txBox="1"/>
+          <p:nvPr/>
+        </p:nvSpPr>
+        <p:spPr>
+          <a:xfrm>
+            <a:off x="685800" y="457200"/>
+            <a:ext cx="7315200" cy="320040"/>
+          </a:xfrm>
+          <a:prstGeom prst="rect">
+            <a:avLst/>
+          </a:prstGeom>
+          <a:noFill/>
+        </p:spPr>
+        <p:txBody>
+          <a:bodyPr wrap="square" anchor="t" lIns="0" rIns="0" tIns="0" bIns="0">
+            <a:spAutoFit/>
+          </a:bodyPr>
+          <a:lstStyle/>
+          <a:p>
+            <a:pPr algn="l">
+              <a:lnSpc>
+                <a:spcPct val="120000"/>
+              </a:lnSpc>
+            </a:pPr>
+            <a:r>
+              <a:rPr sz="1200" b="0" i="0" spc="120">
+                <a:solidFill>
+                  <a:srgbClr val="6FB7D9"/>
+                </a:solidFill>
+                <a:latin typeface="Consolas"/>
+              </a:rPr>
+              <a:t>THE IDEA</a:t>
+            </a:r>
+          </a:p>
+        </p:txBody>
+      </p:sp>
+      <p:sp>
+        <p:nvSpPr>
+          <p:cNvPr id="3" name="TextBox 2"/>
+          <p:cNvSpPr txBox="1"/>
+          <p:nvPr/>
+        </p:nvSpPr>
+        <p:spPr>
+          <a:xfrm>
+            <a:off x="685800" y="868680"/>
+            <a:ext cx="10515600" cy="640080"/>
+          </a:xfrm>
+          <a:prstGeom prst="rect">
+            <a:avLst/>
+          </a:prstGeom>
+          <a:noFill/>
+        </p:spPr>
+        <p:txBody>
+          <a:bodyPr wrap="square" anchor="t" lIns="0" rIns="0" tIns="0" bIns="0">
+            <a:spAutoFit/>
+          </a:bodyPr>
+          <a:lstStyle/>
+          <a:p>
+            <a:pPr algn="l">
+              <a:lnSpc>
+                <a:spcPct val="120000"/>
+              </a:lnSpc>
+            </a:pPr>
+            <a:r>
+              <a:rPr sz="2800" b="0" i="0">
+                <a:solidFill>
+                  <a:srgbClr val="A79A85"/>
+                </a:solidFill>
+                <a:latin typeface="Arial Black"/>
+              </a:rPr>
+              <a:t>YOU ALREADY HAVE THE PANELS.</a:t>
+            </a:r>
+          </a:p>
+        </p:txBody>
+      </p:sp>
+      <p:sp>
+        <p:nvSpPr>
+          <p:cNvPr id="4" name="TextBox 3"/>
+          <p:cNvSpPr txBox="1"/>
+          <p:nvPr/>
+        </p:nvSpPr>
+        <p:spPr>
+          <a:xfrm>
+            <a:off x="685800" y="1417320"/>
+            <a:ext cx="10515600" cy="731520"/>
+          </a:xfrm>
+          <a:prstGeom prst="rect">
+            <a:avLst/>
+          </a:prstGeom>
+          <a:noFill/>
+        </p:spPr>
+        <p:txBody>
+          <a:bodyPr wrap="square" anchor="t" lIns="0" rIns="0" tIns="0" bIns="0">
+            <a:spAutoFit/>
+          </a:bodyPr>
+          <a:lstStyle/>
+          <a:p>
+            <a:pPr algn="l">
+              <a:lnSpc>
+                <a:spcPct val="120000"/>
+              </a:lnSpc>
+            </a:pPr>
+            <a:r>
+              <a:rPr sz="3200" b="0" i="0">
+                <a:solidFill>
+                  <a:srgbClr val="F4C563"/>
+                </a:solidFill>
+                <a:latin typeface="Arial Black"/>
+              </a:rPr>
+              <a:t>NOW THE READER CAN FIND THEM.</a:t>
+            </a:r>
+          </a:p>
+        </p:txBody>
+      </p:sp>
+      <p:sp>
+        <p:nvSpPr>
+          <p:cNvPr id="5" name="Rounded Rectangle 4"/>
+          <p:cNvSpPr/>
+          <p:nvPr/>
+        </p:nvSpPr>
+        <p:spPr>
+          <a:xfrm>
+            <a:off x="685800" y="2514600"/>
+            <a:ext cx="2880360" cy="2331720"/>
+          </a:xfrm>
+          <a:prstGeom prst="roundRect">
+            <a:avLst>
+              <a:gd name="adj" fmla="val 5000"/>
+            </a:avLst>
+          </a:prstGeom>
+          <a:solidFill>
+            <a:srgbClr val="211C15"/>
+          </a:solidFill>
+          <a:ln w="9525">
+            <a:solidFill>
+              <a:srgbClr val="3A3225"/>
+            </a:solidFill>
+          </a:ln>
+          <a:effectLst/>
+        </p:spPr>
+        <p:style>
+          <a:lnRef idx="1">
+            <a:schemeClr val="accent1"/>
+          </a:lnRef>
+          <a:fillRef idx="3">
+            <a:schemeClr val="accent1"/>
+          </a:fillRef>
+          <a:effectRef idx="2">
+            <a:schemeClr val="accent1"/>
+          </a:effectRef>
+          <a:fontRef idx="minor">
+            <a:schemeClr val="lt1"/>
+          </a:fontRef>
+        </p:style>
+        <p:txBody>
+          <a:bodyPr rtlCol="0" anchor="ctr"/>
+          <a:lstStyle/>
+          <a:p>
+            <a:pPr algn="ctr"/>
+          </a:p>
+        </p:txBody>
+      </p:sp>
+      <p:sp>
+        <p:nvSpPr>
+          <p:cNvPr id="6" name="TextBox 5"/>
+          <p:cNvSpPr txBox="1"/>
+          <p:nvPr/>
+        </p:nvSpPr>
+        <p:spPr>
+          <a:xfrm>
+            <a:off x="941832" y="2752344"/>
+            <a:ext cx="2368296" cy="274320"/>
+          </a:xfrm>
+          <a:prstGeom prst="rect">
+            <a:avLst/>
+          </a:prstGeom>
+          <a:noFill/>
+        </p:spPr>
+        <p:txBody>
+          <a:bodyPr wrap="square" anchor="t" lIns="0" rIns="0" tIns="0" bIns="0">
+            <a:spAutoFit/>
+          </a:bodyPr>
+          <a:lstStyle/>
+          <a:p>
+            <a:pPr algn="l">
+              <a:lnSpc>
+                <a:spcPct val="120000"/>
+              </a:lnSpc>
+            </a:pPr>
+            <a:r>
+              <a:rPr sz="1050" b="0" i="0" spc="80">
+                <a:solidFill>
+                  <a:srgbClr val="6FB7D9"/>
+                </a:solidFill>
+                <a:latin typeface="Consolas"/>
+              </a:rPr>
+              <a:t>INPUT</a:t>
+            </a:r>
+          </a:p>
+        </p:txBody>
+      </p:sp>
+      <p:sp>
+        <p:nvSpPr>
+          <p:cNvPr id="7" name="TextBox 6"/>
+          <p:cNvSpPr txBox="1"/>
+          <p:nvPr/>
+        </p:nvSpPr>
+        <p:spPr>
+          <a:xfrm>
+            <a:off x="941832" y="3081528"/>
+            <a:ext cx="2368296" cy="411480"/>
+          </a:xfrm>
+          <a:prstGeom prst="rect">
+            <a:avLst/>
+          </a:prstGeom>
+          <a:noFill/>
+        </p:spPr>
+        <p:txBody>
+          <a:bodyPr wrap="square" anchor="t" lIns="0" rIns="0" tIns="0" bIns="0">
+            <a:spAutoFit/>
+          </a:bodyPr>
+          <a:lstStyle/>
+          <a:p>
+            <a:pPr algn="l">
+              <a:lnSpc>
+                <a:spcPct val="120000"/>
+              </a:lnSpc>
+            </a:pPr>
+            <a:r>
+              <a:rPr sz="1800" b="1" i="0">
+                <a:solidFill>
+                  <a:srgbClr val="F5EFE2"/>
+                </a:solidFill>
+                <a:latin typeface="Calibri"/>
+              </a:rPr>
+              <a:t>Page</a:t>
+            </a:r>
+          </a:p>
+        </p:txBody>
+      </p:sp>
+      <p:sp>
+        <p:nvSpPr>
+          <p:cNvPr id="8" name="TextBox 7"/>
+          <p:cNvSpPr txBox="1"/>
+          <p:nvPr/>
+        </p:nvSpPr>
+        <p:spPr>
+          <a:xfrm>
+            <a:off x="941832" y="3566160"/>
+            <a:ext cx="2368296" cy="1188720"/>
+          </a:xfrm>
+          <a:prstGeom prst="rect">
+            <a:avLst/>
+          </a:prstGeom>
+          <a:noFill/>
+        </p:spPr>
+        <p:txBody>
+          <a:bodyPr wrap="square" anchor="t" lIns="0" rIns="0" tIns="0" bIns="0">
+            <a:spAutoFit/>
+          </a:bodyPr>
+          <a:lstStyle/>
+          <a:p>
+            <a:pPr algn="l">
+              <a:lnSpc>
+                <a:spcPct val="130000"/>
+              </a:lnSpc>
+            </a:pPr>
+            <a:r>
+              <a:rPr sz="1300" b="0" i="0">
+                <a:solidFill>
+                  <a:srgbClr val="A79A85"/>
+                </a:solidFill>
+                <a:latin typeface="Calibri"/>
+              </a:rPr>
+              <a:t>One flat raster image, exactly as it sits in the archive today.</a:t>
+            </a:r>
+          </a:p>
+        </p:txBody>
+      </p:sp>
+      <p:sp>
+        <p:nvSpPr>
+          <p:cNvPr id="9" name="TextBox 8"/>
+          <p:cNvSpPr txBox="1"/>
+          <p:nvPr/>
+        </p:nvSpPr>
+        <p:spPr>
+          <a:xfrm>
+            <a:off x="3566160" y="3451860"/>
+            <a:ext cx="502920" cy="457200"/>
+          </a:xfrm>
+          <a:prstGeom prst="rect">
+            <a:avLst/>
+          </a:prstGeom>
+          <a:noFill/>
+        </p:spPr>
+        <p:txBody>
+          <a:bodyPr wrap="square" anchor="t" lIns="0" rIns="0" tIns="0" bIns="0">
+            <a:spAutoFit/>
+          </a:bodyPr>
+          <a:lstStyle/>
+          <a:p>
+            <a:pPr algn="ctr">
+              <a:lnSpc>
+                <a:spcPct val="120000"/>
+              </a:lnSpc>
+            </a:pPr>
+            <a:r>
+              <a:rPr sz="2000" b="0" i="0">
+                <a:solidFill>
+                  <a:srgbClr val="E8A93C"/>
+                </a:solidFill>
+                <a:latin typeface="Consolas"/>
+              </a:rPr>
+              <a:t>→</a:t>
+            </a:r>
+          </a:p>
+        </p:txBody>
+      </p:sp>
+      <p:sp>
+        <p:nvSpPr>
+          <p:cNvPr id="10" name="Rounded Rectangle 9"/>
+          <p:cNvSpPr/>
+          <p:nvPr/>
+        </p:nvSpPr>
+        <p:spPr>
+          <a:xfrm>
+            <a:off x="4069080" y="2514600"/>
+            <a:ext cx="2880360" cy="2331720"/>
+          </a:xfrm>
+          <a:prstGeom prst="roundRect">
+            <a:avLst>
+              <a:gd name="adj" fmla="val 5000"/>
+            </a:avLst>
+          </a:prstGeom>
+          <a:solidFill>
+            <a:srgbClr val="211C15"/>
+          </a:solidFill>
+          <a:ln w="9525">
+            <a:solidFill>
+              <a:srgbClr val="3A3225"/>
+            </a:solidFill>
+          </a:ln>
+          <a:effectLst/>
+        </p:spPr>
+        <p:style>
+          <a:lnRef idx="1">
+            <a:schemeClr val="accent1"/>
+          </a:lnRef>
+          <a:fillRef idx="3">
+            <a:schemeClr val="accent1"/>
+          </a:fillRef>
+          <a:effectRef idx="2">
+            <a:schemeClr val="accent1"/>
+          </a:effectRef>
+          <a:fontRef idx="minor">
+            <a:schemeClr val="lt1"/>
+          </a:fontRef>
+        </p:style>
+        <p:txBody>
+          <a:bodyPr rtlCol="0" anchor="ctr"/>
+          <a:lstStyle/>
+          <a:p>
+            <a:pPr algn="ctr"/>
+          </a:p>
+        </p:txBody>
+      </p:sp>
+      <p:sp>
+        <p:nvSpPr>
+          <p:cNvPr id="11" name="TextBox 10"/>
+          <p:cNvSpPr txBox="1"/>
+          <p:nvPr/>
+        </p:nvSpPr>
+        <p:spPr>
+          <a:xfrm>
+            <a:off x="4325112" y="2752344"/>
+            <a:ext cx="2368296" cy="274320"/>
+          </a:xfrm>
+          <a:prstGeom prst="rect">
+            <a:avLst/>
+          </a:prstGeom>
+          <a:noFill/>
+        </p:spPr>
+        <p:txBody>
+          <a:bodyPr wrap="square" anchor="t" lIns="0" rIns="0" tIns="0" bIns="0">
+            <a:spAutoFit/>
+          </a:bodyPr>
+          <a:lstStyle/>
+          <a:p>
+            <a:pPr algn="l">
+              <a:lnSpc>
+                <a:spcPct val="120000"/>
+              </a:lnSpc>
+            </a:pPr>
+            <a:r>
+              <a:rPr sz="1050" b="0" i="0" spc="80">
+                <a:solidFill>
+                  <a:srgbClr val="6FB7D9"/>
+                </a:solidFill>
+                <a:latin typeface="Consolas"/>
+              </a:rPr>
+              <a:t>EDITOR DRAWS</a:t>
+            </a:r>
+          </a:p>
+        </p:txBody>
+      </p:sp>
+      <p:sp>
+        <p:nvSpPr>
+          <p:cNvPr id="12" name="TextBox 11"/>
+          <p:cNvSpPr txBox="1"/>
+          <p:nvPr/>
+        </p:nvSpPr>
+        <p:spPr>
+          <a:xfrm>
+            <a:off x="4325112" y="3081528"/>
+            <a:ext cx="2368296" cy="411480"/>
+          </a:xfrm>
+          <a:prstGeom prst="rect">
+            <a:avLst/>
+          </a:prstGeom>
+          <a:noFill/>
+        </p:spPr>
+        <p:txBody>
+          <a:bodyPr wrap="square" anchor="t" lIns="0" rIns="0" tIns="0" bIns="0">
+            <a:spAutoFit/>
+          </a:bodyPr>
+          <a:lstStyle/>
+          <a:p>
+            <a:pPr algn="l">
+              <a:lnSpc>
+                <a:spcPct val="120000"/>
+              </a:lnSpc>
+            </a:pPr>
+            <a:r>
+              <a:rPr sz="1800" b="1" i="0">
+                <a:solidFill>
+                  <a:srgbClr val="F5EFE2"/>
+                </a:solidFill>
+                <a:latin typeface="Calibri"/>
+              </a:rPr>
+              <a:t>Panels</a:t>
+            </a:r>
+          </a:p>
+        </p:txBody>
+      </p:sp>
+      <p:sp>
+        <p:nvSpPr>
+          <p:cNvPr id="13" name="TextBox 12"/>
+          <p:cNvSpPr txBox="1"/>
+          <p:nvPr/>
+        </p:nvSpPr>
+        <p:spPr>
+          <a:xfrm>
+            <a:off x="4325112" y="3566160"/>
+            <a:ext cx="2368296" cy="1188720"/>
+          </a:xfrm>
+          <a:prstGeom prst="rect">
+            <a:avLst/>
+          </a:prstGeom>
+          <a:noFill/>
+        </p:spPr>
+        <p:txBody>
+          <a:bodyPr wrap="square" anchor="t" lIns="0" rIns="0" tIns="0" bIns="0">
+            <a:spAutoFit/>
+          </a:bodyPr>
+          <a:lstStyle/>
+          <a:p>
+            <a:pPr algn="l">
+              <a:lnSpc>
+                <a:spcPct val="130000"/>
+              </a:lnSpc>
+            </a:pPr>
+            <a:r>
+              <a:rPr sz="1300" b="0" i="0">
+                <a:solidFill>
+                  <a:srgbClr val="A79A85"/>
+                </a:solidFill>
+                <a:latin typeface="Calibri"/>
+              </a:rPr>
+              <a:t>Each panel becomes its own shape — a rectangle, or any polygon.</a:t>
+            </a:r>
+          </a:p>
+        </p:txBody>
+      </p:sp>
+      <p:sp>
+        <p:nvSpPr>
+          <p:cNvPr id="14" name="TextBox 13"/>
+          <p:cNvSpPr txBox="1"/>
+          <p:nvPr/>
+        </p:nvSpPr>
+        <p:spPr>
+          <a:xfrm>
+            <a:off x="6949440" y="3451860"/>
+            <a:ext cx="502920" cy="457200"/>
+          </a:xfrm>
+          <a:prstGeom prst="rect">
+            <a:avLst/>
+          </a:prstGeom>
+          <a:noFill/>
+        </p:spPr>
+        <p:txBody>
+          <a:bodyPr wrap="square" anchor="t" lIns="0" rIns="0" tIns="0" bIns="0">
+            <a:spAutoFit/>
+          </a:bodyPr>
+          <a:lstStyle/>
+          <a:p>
+            <a:pPr algn="ctr">
+              <a:lnSpc>
+                <a:spcPct val="120000"/>
+              </a:lnSpc>
+            </a:pPr>
+            <a:r>
+              <a:rPr sz="2000" b="0" i="0">
+                <a:solidFill>
+                  <a:srgbClr val="E8A93C"/>
+                </a:solidFill>
+                <a:latin typeface="Consolas"/>
+              </a:rPr>
+              <a:t>→</a:t>
+            </a:r>
+          </a:p>
+        </p:txBody>
+      </p:sp>
+      <p:sp>
+        <p:nvSpPr>
+          <p:cNvPr id="15" name="Rounded Rectangle 14"/>
+          <p:cNvSpPr/>
+          <p:nvPr/>
+        </p:nvSpPr>
+        <p:spPr>
+          <a:xfrm>
+            <a:off x="7452360" y="2514600"/>
+            <a:ext cx="2880360" cy="2331720"/>
+          </a:xfrm>
+          <a:prstGeom prst="roundRect">
+            <a:avLst>
+              <a:gd name="adj" fmla="val 5000"/>
+            </a:avLst>
+          </a:prstGeom>
+          <a:solidFill>
+            <a:srgbClr val="211C15"/>
+          </a:solidFill>
+          <a:ln w="9525">
+            <a:solidFill>
+              <a:srgbClr val="3A3225"/>
+            </a:solidFill>
+          </a:ln>
+          <a:effectLst/>
+        </p:spPr>
+        <p:style>
+          <a:lnRef idx="1">
+            <a:schemeClr val="accent1"/>
+          </a:lnRef>
+          <a:fillRef idx="3">
+            <a:schemeClr val="accent1"/>
+          </a:fillRef>
+          <a:effectRef idx="2">
+            <a:schemeClr val="accent1"/>
+          </a:effectRef>
+          <a:fontRef idx="minor">
+            <a:schemeClr val="lt1"/>
+          </a:fontRef>
+        </p:style>
+        <p:txBody>
+          <a:bodyPr rtlCol="0" anchor="ctr"/>
+          <a:lstStyle/>
+          <a:p>
+            <a:pPr algn="ctr"/>
+          </a:p>
+        </p:txBody>
+      </p:sp>
+      <p:sp>
+        <p:nvSpPr>
+          <p:cNvPr id="16" name="TextBox 15"/>
+          <p:cNvSpPr txBox="1"/>
+          <p:nvPr/>
+        </p:nvSpPr>
+        <p:spPr>
+          <a:xfrm>
+            <a:off x="7708392" y="2752344"/>
+            <a:ext cx="2368296" cy="274320"/>
+          </a:xfrm>
+          <a:prstGeom prst="rect">
+            <a:avLst/>
+          </a:prstGeom>
+          <a:noFill/>
+        </p:spPr>
+        <p:txBody>
+          <a:bodyPr wrap="square" anchor="t" lIns="0" rIns="0" tIns="0" bIns="0">
+            <a:spAutoFit/>
+          </a:bodyPr>
+          <a:lstStyle/>
+          <a:p>
+            <a:pPr algn="l">
+              <a:lnSpc>
+                <a:spcPct val="120000"/>
+              </a:lnSpc>
+            </a:pPr>
+            <a:r>
+              <a:rPr sz="1050" b="0" i="0" spc="80">
+                <a:solidFill>
+                  <a:srgbClr val="6FB7D9"/>
+                </a:solidFill>
+                <a:latin typeface="Consolas"/>
+              </a:rPr>
+              <a:t>READER FOLLOWS</a:t>
+            </a:r>
+          </a:p>
+        </p:txBody>
+      </p:sp>
+      <p:sp>
+        <p:nvSpPr>
+          <p:cNvPr id="17" name="TextBox 16"/>
+          <p:cNvSpPr txBox="1"/>
+          <p:nvPr/>
+        </p:nvSpPr>
+        <p:spPr>
+          <a:xfrm>
+            <a:off x="7708392" y="3081528"/>
+            <a:ext cx="2368296" cy="411480"/>
+          </a:xfrm>
+          <a:prstGeom prst="rect">
+            <a:avLst/>
+          </a:prstGeom>
+          <a:noFill/>
+        </p:spPr>
+        <p:txBody>
+          <a:bodyPr wrap="square" anchor="t" lIns="0" rIns="0" tIns="0" bIns="0">
+            <a:spAutoFit/>
+          </a:bodyPr>
+          <a:lstStyle/>
+          <a:p>
+            <a:pPr algn="l">
+              <a:lnSpc>
+                <a:spcPct val="120000"/>
+              </a:lnSpc>
+            </a:pPr>
+            <a:r>
+              <a:rPr sz="1800" b="1" i="0">
+                <a:solidFill>
+                  <a:srgbClr val="F5EFE2"/>
+                </a:solidFill>
+                <a:latin typeface="Calibri"/>
+              </a:rPr>
+              <a:t>Reading order</a:t>
+            </a:r>
+          </a:p>
+        </p:txBody>
+      </p:sp>
+      <p:sp>
+        <p:nvSpPr>
+          <p:cNvPr id="18" name="TextBox 17"/>
+          <p:cNvSpPr txBox="1"/>
+          <p:nvPr/>
+        </p:nvSpPr>
+        <p:spPr>
+          <a:xfrm>
+            <a:off x="7708392" y="3566160"/>
+            <a:ext cx="2368296" cy="1188720"/>
+          </a:xfrm>
+          <a:prstGeom prst="rect">
+            <a:avLst/>
+          </a:prstGeom>
+          <a:noFill/>
+        </p:spPr>
+        <p:txBody>
+          <a:bodyPr wrap="square" anchor="t" lIns="0" rIns="0" tIns="0" bIns="0">
+            <a:spAutoFit/>
+          </a:bodyPr>
+          <a:lstStyle/>
+          <a:p>
+            <a:pPr algn="l">
+              <a:lnSpc>
+                <a:spcPct val="130000"/>
+              </a:lnSpc>
+            </a:pPr>
+            <a:r>
+              <a:rPr sz="1300" b="0" i="0">
+                <a:solidFill>
+                  <a:srgbClr val="A79A85"/>
+                </a:solidFill>
+                <a:latin typeface="Calibri"/>
+              </a:rPr>
+              <a:t>The sequence you set is exactly the path the reader is guided through.</a:t>
+            </a:r>
+          </a:p>
+        </p:txBody>
+      </p:sp>
     </p:spTree>
   </p:cSld>
   <p:clrMapOvr>
@@ -3172,6 +4440,14 @@
 <file path=ppt/slides/slide3.xml><?xml version="1.0" encoding="utf-8"?>
 <p:sld xmlns:a="http://schemas.openxmlformats.org/drawingml/2006/main" xmlns:p="http://schemas.openxmlformats.org/presentationml/2006/main" xmlns:r="http://schemas.openxmlformats.org/officeDocument/2006/relationships">
   <p:cSld>
+    <p:bg>
+      <p:bgPr>
+        <a:solidFill>
+          <a:srgbClr val="17140F"/>
+        </a:solidFill>
+        <a:effectLst/>
+      </p:bgPr>
+    </p:bg>
     <p:spTree>
       <p:nvGrpSpPr>
         <p:cNvPr id="1" name=""/>
@@ -3179,30 +4455,573 @@
         <p:nvPr/>
       </p:nvGrpSpPr>
       <p:grpSpPr/>
-      <p:pic>
-        <p:nvPicPr>
-          <p:cNvPr id="2" name="Picture 1" descr="slide-03.png"/>
-          <p:cNvPicPr>
-            <a:picLocks noChangeAspect="1"/>
-          </p:cNvPicPr>
-          <p:nvPr/>
-        </p:nvPicPr>
-        <p:blipFill>
-          <a:blip r:embed="rId2"/>
-          <a:stretch>
-            <a:fillRect/>
-          </a:stretch>
-        </p:blipFill>
-        <p:spPr>
-          <a:xfrm>
-            <a:off x="0" y="0"/>
-            <a:ext cx="12191695" cy="6858000"/>
-          </a:xfrm>
-          <a:prstGeom prst="rect">
-            <a:avLst/>
-          </a:prstGeom>
-        </p:spPr>
-      </p:pic>
+      <p:sp>
+        <p:nvSpPr>
+          <p:cNvPr id="2" name="TextBox 1"/>
+          <p:cNvSpPr txBox="1"/>
+          <p:nvPr/>
+        </p:nvSpPr>
+        <p:spPr>
+          <a:xfrm>
+            <a:off x="685800" y="457200"/>
+            <a:ext cx="7315200" cy="320040"/>
+          </a:xfrm>
+          <a:prstGeom prst="rect">
+            <a:avLst/>
+          </a:prstGeom>
+          <a:noFill/>
+        </p:spPr>
+        <p:txBody>
+          <a:bodyPr wrap="square" anchor="t" lIns="0" rIns="0" tIns="0" bIns="0">
+            <a:spAutoFit/>
+          </a:bodyPr>
+          <a:lstStyle/>
+          <a:p>
+            <a:pPr algn="l">
+              <a:lnSpc>
+                <a:spcPct val="120000"/>
+              </a:lnSpc>
+            </a:pPr>
+            <a:r>
+              <a:rPr sz="1200" b="0" i="0" spc="120">
+                <a:solidFill>
+                  <a:srgbClr val="6FB7D9"/>
+                </a:solidFill>
+                <a:latin typeface="Consolas"/>
+              </a:rPr>
+              <a:t>WHY READERS CARE</a:t>
+            </a:r>
+          </a:p>
+        </p:txBody>
+      </p:sp>
+      <p:sp>
+        <p:nvSpPr>
+          <p:cNvPr id="3" name="TextBox 2"/>
+          <p:cNvSpPr txBox="1"/>
+          <p:nvPr/>
+        </p:nvSpPr>
+        <p:spPr>
+          <a:xfrm>
+            <a:off x="685800" y="841248"/>
+            <a:ext cx="9601200" cy="1097280"/>
+          </a:xfrm>
+          <a:prstGeom prst="rect">
+            <a:avLst/>
+          </a:prstGeom>
+          <a:noFill/>
+        </p:spPr>
+        <p:txBody>
+          <a:bodyPr wrap="square" anchor="t" lIns="0" rIns="0" tIns="0" bIns="0">
+            <a:spAutoFit/>
+          </a:bodyPr>
+          <a:lstStyle/>
+          <a:p>
+            <a:pPr algn="l">
+              <a:lnSpc>
+                <a:spcPct val="100000"/>
+              </a:lnSpc>
+            </a:pPr>
+            <a:r>
+              <a:rPr sz="3000" b="0" i="0">
+                <a:solidFill>
+                  <a:srgbClr val="F4C563"/>
+                </a:solidFill>
+                <a:latin typeface="Arial Black"/>
+              </a:rPr>
+              <a:t>A PAGE BUILT FOR PRINT ISN'T BUILT FOR A PALM</a:t>
+            </a:r>
+          </a:p>
+        </p:txBody>
+      </p:sp>
+      <p:sp>
+        <p:nvSpPr>
+          <p:cNvPr id="4" name="Oval 3"/>
+          <p:cNvSpPr/>
+          <p:nvPr/>
+        </p:nvSpPr>
+        <p:spPr>
+          <a:xfrm>
+            <a:off x="685800" y="2203704"/>
+            <a:ext cx="457200" cy="457200"/>
+          </a:xfrm>
+          <a:prstGeom prst="ellipse">
+            <a:avLst/>
+          </a:prstGeom>
+          <a:solidFill>
+            <a:srgbClr val="211C15"/>
+          </a:solidFill>
+          <a:ln w="12700">
+            <a:solidFill>
+              <a:srgbClr val="3A3225"/>
+            </a:solidFill>
+          </a:ln>
+          <a:effectLst/>
+        </p:spPr>
+        <p:style>
+          <a:lnRef idx="1">
+            <a:schemeClr val="accent1"/>
+          </a:lnRef>
+          <a:fillRef idx="3">
+            <a:schemeClr val="accent1"/>
+          </a:fillRef>
+          <a:effectRef idx="2">
+            <a:schemeClr val="accent1"/>
+          </a:effectRef>
+          <a:fontRef idx="minor">
+            <a:schemeClr val="lt1"/>
+          </a:fontRef>
+        </p:style>
+        <p:txBody>
+          <a:bodyPr rtlCol="0" anchor="ctr"/>
+          <a:lstStyle/>
+          <a:p>
+            <a:pPr algn="ctr"/>
+          </a:p>
+        </p:txBody>
+      </p:sp>
+      <p:sp>
+        <p:nvSpPr>
+          <p:cNvPr id="5" name="TextBox 4"/>
+          <p:cNvSpPr txBox="1"/>
+          <p:nvPr/>
+        </p:nvSpPr>
+        <p:spPr>
+          <a:xfrm>
+            <a:off x="685800" y="2203704"/>
+            <a:ext cx="457200" cy="457200"/>
+          </a:xfrm>
+          <a:prstGeom prst="rect">
+            <a:avLst/>
+          </a:prstGeom>
+          <a:noFill/>
+        </p:spPr>
+        <p:txBody>
+          <a:bodyPr wrap="square" anchor="ctr" lIns="0" rIns="0" tIns="0" bIns="0">
+            <a:spAutoFit/>
+          </a:bodyPr>
+          <a:lstStyle/>
+          <a:p>
+            <a:pPr algn="ctr">
+              <a:lnSpc>
+                <a:spcPct val="120000"/>
+              </a:lnSpc>
+            </a:pPr>
+            <a:r>
+              <a:rPr sz="1200" b="0" i="0">
+                <a:solidFill>
+                  <a:srgbClr val="E8A93C"/>
+                </a:solidFill>
+                <a:latin typeface="Calibri"/>
+              </a:rPr>
+              <a:t>●</a:t>
+            </a:r>
+          </a:p>
+        </p:txBody>
+      </p:sp>
+      <p:sp>
+        <p:nvSpPr>
+          <p:cNvPr id="6" name="TextBox 5"/>
+          <p:cNvSpPr txBox="1"/>
+          <p:nvPr/>
+        </p:nvSpPr>
+        <p:spPr>
+          <a:xfrm>
+            <a:off x="1371600" y="2148840"/>
+            <a:ext cx="8961120" cy="320040"/>
+          </a:xfrm>
+          <a:prstGeom prst="rect">
+            <a:avLst/>
+          </a:prstGeom>
+          <a:noFill/>
+        </p:spPr>
+        <p:txBody>
+          <a:bodyPr wrap="square" anchor="t" lIns="0" rIns="0" tIns="0" bIns="0">
+            <a:spAutoFit/>
+          </a:bodyPr>
+          <a:lstStyle/>
+          <a:p>
+            <a:pPr algn="l">
+              <a:lnSpc>
+                <a:spcPct val="120000"/>
+              </a:lnSpc>
+            </a:pPr>
+            <a:r>
+              <a:rPr sz="1700" b="1" i="0">
+                <a:solidFill>
+                  <a:srgbClr val="F5EFE2"/>
+                </a:solidFill>
+                <a:latin typeface="Calibri"/>
+              </a:rPr>
+              <a:t>Small screens, full pages</a:t>
+            </a:r>
+          </a:p>
+        </p:txBody>
+      </p:sp>
+      <p:sp>
+        <p:nvSpPr>
+          <p:cNvPr id="7" name="TextBox 6"/>
+          <p:cNvSpPr txBox="1"/>
+          <p:nvPr/>
+        </p:nvSpPr>
+        <p:spPr>
+          <a:xfrm>
+            <a:off x="1371600" y="2532888"/>
+            <a:ext cx="8961120" cy="548640"/>
+          </a:xfrm>
+          <a:prstGeom prst="rect">
+            <a:avLst/>
+          </a:prstGeom>
+          <a:noFill/>
+        </p:spPr>
+        <p:txBody>
+          <a:bodyPr wrap="square" anchor="t" lIns="0" rIns="0" tIns="0" bIns="0">
+            <a:spAutoFit/>
+          </a:bodyPr>
+          <a:lstStyle/>
+          <a:p>
+            <a:pPr algn="l">
+              <a:lnSpc>
+                <a:spcPct val="130000"/>
+              </a:lnSpc>
+            </a:pPr>
+            <a:r>
+              <a:rPr sz="1350" b="0" i="0">
+                <a:solidFill>
+                  <a:srgbClr val="A79A85"/>
+                </a:solidFill>
+                <a:latin typeface="Calibri"/>
+              </a:rPr>
+              <a:t>Shrink a print-lettered page to a phone and the dialogue goes illegible before the art does.</a:t>
+            </a:r>
+          </a:p>
+        </p:txBody>
+      </p:sp>
+      <p:sp>
+        <p:nvSpPr>
+          <p:cNvPr id="8" name="Oval 7"/>
+          <p:cNvSpPr/>
+          <p:nvPr/>
+        </p:nvSpPr>
+        <p:spPr>
+          <a:xfrm>
+            <a:off x="685800" y="3438144"/>
+            <a:ext cx="457200" cy="457200"/>
+          </a:xfrm>
+          <a:prstGeom prst="ellipse">
+            <a:avLst/>
+          </a:prstGeom>
+          <a:solidFill>
+            <a:srgbClr val="211C15"/>
+          </a:solidFill>
+          <a:ln w="12700">
+            <a:solidFill>
+              <a:srgbClr val="3A3225"/>
+            </a:solidFill>
+          </a:ln>
+          <a:effectLst/>
+        </p:spPr>
+        <p:style>
+          <a:lnRef idx="1">
+            <a:schemeClr val="accent1"/>
+          </a:lnRef>
+          <a:fillRef idx="3">
+            <a:schemeClr val="accent1"/>
+          </a:fillRef>
+          <a:effectRef idx="2">
+            <a:schemeClr val="accent1"/>
+          </a:effectRef>
+          <a:fontRef idx="minor">
+            <a:schemeClr val="lt1"/>
+          </a:fontRef>
+        </p:style>
+        <p:txBody>
+          <a:bodyPr rtlCol="0" anchor="ctr"/>
+          <a:lstStyle/>
+          <a:p>
+            <a:pPr algn="ctr"/>
+          </a:p>
+        </p:txBody>
+      </p:sp>
+      <p:sp>
+        <p:nvSpPr>
+          <p:cNvPr id="9" name="TextBox 8"/>
+          <p:cNvSpPr txBox="1"/>
+          <p:nvPr/>
+        </p:nvSpPr>
+        <p:spPr>
+          <a:xfrm>
+            <a:off x="685800" y="3438144"/>
+            <a:ext cx="457200" cy="457200"/>
+          </a:xfrm>
+          <a:prstGeom prst="rect">
+            <a:avLst/>
+          </a:prstGeom>
+          <a:noFill/>
+        </p:spPr>
+        <p:txBody>
+          <a:bodyPr wrap="square" anchor="ctr" lIns="0" rIns="0" tIns="0" bIns="0">
+            <a:spAutoFit/>
+          </a:bodyPr>
+          <a:lstStyle/>
+          <a:p>
+            <a:pPr algn="ctr">
+              <a:lnSpc>
+                <a:spcPct val="120000"/>
+              </a:lnSpc>
+            </a:pPr>
+            <a:r>
+              <a:rPr sz="1200" b="0" i="0">
+                <a:solidFill>
+                  <a:srgbClr val="E8A93C"/>
+                </a:solidFill>
+                <a:latin typeface="Calibri"/>
+              </a:rPr>
+              <a:t>●</a:t>
+            </a:r>
+          </a:p>
+        </p:txBody>
+      </p:sp>
+      <p:sp>
+        <p:nvSpPr>
+          <p:cNvPr id="10" name="TextBox 9"/>
+          <p:cNvSpPr txBox="1"/>
+          <p:nvPr/>
+        </p:nvSpPr>
+        <p:spPr>
+          <a:xfrm>
+            <a:off x="1371600" y="3383280"/>
+            <a:ext cx="8961120" cy="320040"/>
+          </a:xfrm>
+          <a:prstGeom prst="rect">
+            <a:avLst/>
+          </a:prstGeom>
+          <a:noFill/>
+        </p:spPr>
+        <p:txBody>
+          <a:bodyPr wrap="square" anchor="t" lIns="0" rIns="0" tIns="0" bIns="0">
+            <a:spAutoFit/>
+          </a:bodyPr>
+          <a:lstStyle/>
+          <a:p>
+            <a:pPr algn="l">
+              <a:lnSpc>
+                <a:spcPct val="120000"/>
+              </a:lnSpc>
+            </a:pPr>
+            <a:r>
+              <a:rPr sz="1700" b="1" i="0">
+                <a:solidFill>
+                  <a:srgbClr val="F5EFE2"/>
+                </a:solidFill>
+                <a:latin typeface="Calibri"/>
+              </a:rPr>
+              <a:t>Guided, not zoomed</a:t>
+            </a:r>
+          </a:p>
+        </p:txBody>
+      </p:sp>
+      <p:sp>
+        <p:nvSpPr>
+          <p:cNvPr id="11" name="TextBox 10"/>
+          <p:cNvSpPr txBox="1"/>
+          <p:nvPr/>
+        </p:nvSpPr>
+        <p:spPr>
+          <a:xfrm>
+            <a:off x="1371600" y="3767328"/>
+            <a:ext cx="8961120" cy="548640"/>
+          </a:xfrm>
+          <a:prstGeom prst="rect">
+            <a:avLst/>
+          </a:prstGeom>
+          <a:noFill/>
+        </p:spPr>
+        <p:txBody>
+          <a:bodyPr wrap="square" anchor="t" lIns="0" rIns="0" tIns="0" bIns="0">
+            <a:spAutoFit/>
+          </a:bodyPr>
+          <a:lstStyle/>
+          <a:p>
+            <a:pPr algn="l">
+              <a:lnSpc>
+                <a:spcPct val="130000"/>
+              </a:lnSpc>
+            </a:pPr>
+            <a:r>
+              <a:rPr sz="1350" b="0" i="0">
+                <a:solidFill>
+                  <a:srgbClr val="A79A85"/>
+                </a:solidFill>
+                <a:latin typeface="Calibri"/>
+              </a:rPr>
+              <a:t>Guided View pans and zooms to every panel automatically, in reading order — no pinching, no hunting for the next line.</a:t>
+            </a:r>
+          </a:p>
+        </p:txBody>
+      </p:sp>
+      <p:sp>
+        <p:nvSpPr>
+          <p:cNvPr id="12" name="Oval 11"/>
+          <p:cNvSpPr/>
+          <p:nvPr/>
+        </p:nvSpPr>
+        <p:spPr>
+          <a:xfrm>
+            <a:off x="685800" y="4672584"/>
+            <a:ext cx="457200" cy="457200"/>
+          </a:xfrm>
+          <a:prstGeom prst="ellipse">
+            <a:avLst/>
+          </a:prstGeom>
+          <a:solidFill>
+            <a:srgbClr val="211C15"/>
+          </a:solidFill>
+          <a:ln w="12700">
+            <a:solidFill>
+              <a:srgbClr val="3A3225"/>
+            </a:solidFill>
+          </a:ln>
+          <a:effectLst/>
+        </p:spPr>
+        <p:style>
+          <a:lnRef idx="1">
+            <a:schemeClr val="accent1"/>
+          </a:lnRef>
+          <a:fillRef idx="3">
+            <a:schemeClr val="accent1"/>
+          </a:fillRef>
+          <a:effectRef idx="2">
+            <a:schemeClr val="accent1"/>
+          </a:effectRef>
+          <a:fontRef idx="minor">
+            <a:schemeClr val="lt1"/>
+          </a:fontRef>
+        </p:style>
+        <p:txBody>
+          <a:bodyPr rtlCol="0" anchor="ctr"/>
+          <a:lstStyle/>
+          <a:p>
+            <a:pPr algn="ctr"/>
+          </a:p>
+        </p:txBody>
+      </p:sp>
+      <p:sp>
+        <p:nvSpPr>
+          <p:cNvPr id="13" name="TextBox 12"/>
+          <p:cNvSpPr txBox="1"/>
+          <p:nvPr/>
+        </p:nvSpPr>
+        <p:spPr>
+          <a:xfrm>
+            <a:off x="685800" y="4672584"/>
+            <a:ext cx="457200" cy="457200"/>
+          </a:xfrm>
+          <a:prstGeom prst="rect">
+            <a:avLst/>
+          </a:prstGeom>
+          <a:noFill/>
+        </p:spPr>
+        <p:txBody>
+          <a:bodyPr wrap="square" anchor="ctr" lIns="0" rIns="0" tIns="0" bIns="0">
+            <a:spAutoFit/>
+          </a:bodyPr>
+          <a:lstStyle/>
+          <a:p>
+            <a:pPr algn="ctr">
+              <a:lnSpc>
+                <a:spcPct val="120000"/>
+              </a:lnSpc>
+            </a:pPr>
+            <a:r>
+              <a:rPr sz="1200" b="0" i="0">
+                <a:solidFill>
+                  <a:srgbClr val="E8A93C"/>
+                </a:solidFill>
+                <a:latin typeface="Calibri"/>
+              </a:rPr>
+              <a:t>●</a:t>
+            </a:r>
+          </a:p>
+        </p:txBody>
+      </p:sp>
+      <p:sp>
+        <p:nvSpPr>
+          <p:cNvPr id="14" name="TextBox 13"/>
+          <p:cNvSpPr txBox="1"/>
+          <p:nvPr/>
+        </p:nvSpPr>
+        <p:spPr>
+          <a:xfrm>
+            <a:off x="1371600" y="4617720"/>
+            <a:ext cx="8961120" cy="320040"/>
+          </a:xfrm>
+          <a:prstGeom prst="rect">
+            <a:avLst/>
+          </a:prstGeom>
+          <a:noFill/>
+        </p:spPr>
+        <p:txBody>
+          <a:bodyPr wrap="square" anchor="t" lIns="0" rIns="0" tIns="0" bIns="0">
+            <a:spAutoFit/>
+          </a:bodyPr>
+          <a:lstStyle/>
+          <a:p>
+            <a:pPr algn="l">
+              <a:lnSpc>
+                <a:spcPct val="120000"/>
+              </a:lnSpc>
+            </a:pPr>
+            <a:r>
+              <a:rPr sz="1700" b="1" i="0">
+                <a:solidFill>
+                  <a:srgbClr val="F5EFE2"/>
+                </a:solidFill>
+                <a:latin typeface="Calibri"/>
+              </a:rPr>
+              <a:t>Runs on their device</a:t>
+            </a:r>
+          </a:p>
+        </p:txBody>
+      </p:sp>
+      <p:sp>
+        <p:nvSpPr>
+          <p:cNvPr id="15" name="TextBox 14"/>
+          <p:cNvSpPr txBox="1"/>
+          <p:nvPr/>
+        </p:nvSpPr>
+        <p:spPr>
+          <a:xfrm>
+            <a:off x="1371600" y="5001768"/>
+            <a:ext cx="8961120" cy="548640"/>
+          </a:xfrm>
+          <a:prstGeom prst="rect">
+            <a:avLst/>
+          </a:prstGeom>
+          <a:noFill/>
+        </p:spPr>
+        <p:txBody>
+          <a:bodyPr wrap="square" anchor="t" lIns="0" rIns="0" tIns="0" bIns="0">
+            <a:spAutoFit/>
+          </a:bodyPr>
+          <a:lstStyle/>
+          <a:p>
+            <a:pPr algn="l">
+              <a:lnSpc>
+                <a:spcPct val="130000"/>
+              </a:lnSpc>
+            </a:pPr>
+            <a:r>
+              <a:rPr sz="1350" b="0" i="0">
+                <a:solidFill>
+                  <a:srgbClr val="A79A85"/>
+                </a:solidFill>
+                <a:latin typeface="Calibri"/>
+              </a:rPr>
+              <a:t>No upload, no server round-trip. The reader's copy of the issue never leaves their phone.</a:t>
+            </a:r>
+          </a:p>
+        </p:txBody>
+      </p:sp>
     </p:spTree>
   </p:cSld>
   <p:clrMapOvr>
@@ -3214,6 +5033,14 @@
 <file path=ppt/slides/slide4.xml><?xml version="1.0" encoding="utf-8"?>
 <p:sld xmlns:a="http://schemas.openxmlformats.org/drawingml/2006/main" xmlns:p="http://schemas.openxmlformats.org/presentationml/2006/main" xmlns:r="http://schemas.openxmlformats.org/officeDocument/2006/relationships">
   <p:cSld>
+    <p:bg>
+      <p:bgPr>
+        <a:solidFill>
+          <a:srgbClr val="17140F"/>
+        </a:solidFill>
+        <a:effectLst/>
+      </p:bgPr>
+    </p:bg>
     <p:spTree>
       <p:nvGrpSpPr>
         <p:cNvPr id="1" name=""/>
@@ -3221,9 +5048,491 @@
         <p:nvPr/>
       </p:nvGrpSpPr>
       <p:grpSpPr/>
+      <p:sp>
+        <p:nvSpPr>
+          <p:cNvPr id="2" name="TextBox 1"/>
+          <p:cNvSpPr txBox="1"/>
+          <p:nvPr/>
+        </p:nvSpPr>
+        <p:spPr>
+          <a:xfrm>
+            <a:off x="685800" y="457200"/>
+            <a:ext cx="7315200" cy="320040"/>
+          </a:xfrm>
+          <a:prstGeom prst="rect">
+            <a:avLst/>
+          </a:prstGeom>
+          <a:noFill/>
+        </p:spPr>
+        <p:txBody>
+          <a:bodyPr wrap="square" anchor="t" lIns="0" rIns="0" tIns="0" bIns="0">
+            <a:spAutoFit/>
+          </a:bodyPr>
+          <a:lstStyle/>
+          <a:p>
+            <a:pPr algn="l">
+              <a:lnSpc>
+                <a:spcPct val="120000"/>
+              </a:lnSpc>
+            </a:pPr>
+            <a:r>
+              <a:rPr sz="1200" b="0" i="0" spc="120">
+                <a:solidFill>
+                  <a:srgbClr val="6FB7D9"/>
+                </a:solidFill>
+                <a:latin typeface="Consolas"/>
+              </a:rPr>
+              <a:t>STEP 1 OF 3</a:t>
+            </a:r>
+          </a:p>
+        </p:txBody>
+      </p:sp>
+      <p:sp>
+        <p:nvSpPr>
+          <p:cNvPr id="3" name="TextBox 2"/>
+          <p:cNvSpPr txBox="1"/>
+          <p:nvPr/>
+        </p:nvSpPr>
+        <p:spPr>
+          <a:xfrm>
+            <a:off x="685800" y="841248"/>
+            <a:ext cx="9601200" cy="1097280"/>
+          </a:xfrm>
+          <a:prstGeom prst="rect">
+            <a:avLst/>
+          </a:prstGeom>
+          <a:noFill/>
+        </p:spPr>
+        <p:txBody>
+          <a:bodyPr wrap="square" anchor="t" lIns="0" rIns="0" tIns="0" bIns="0">
+            <a:spAutoFit/>
+          </a:bodyPr>
+          <a:lstStyle/>
+          <a:p>
+            <a:pPr algn="l">
+              <a:lnSpc>
+                <a:spcPct val="100000"/>
+              </a:lnSpc>
+            </a:pPr>
+            <a:r>
+              <a:rPr sz="3000" b="0" i="0">
+                <a:solidFill>
+                  <a:srgbClr val="F4C563"/>
+                </a:solidFill>
+                <a:latin typeface="Arial Black"/>
+              </a:rPr>
+              <a:t>DROP IN THE ARCHIVE</a:t>
+            </a:r>
+          </a:p>
+        </p:txBody>
+      </p:sp>
+      <p:sp>
+        <p:nvSpPr>
+          <p:cNvPr id="4" name="Oval 3"/>
+          <p:cNvSpPr/>
+          <p:nvPr/>
+        </p:nvSpPr>
+        <p:spPr>
+          <a:xfrm>
+            <a:off x="685800" y="2148840"/>
+            <a:ext cx="502920" cy="502920"/>
+          </a:xfrm>
+          <a:prstGeom prst="ellipse">
+            <a:avLst/>
+          </a:prstGeom>
+          <a:solidFill>
+            <a:srgbClr val="E8A93C"/>
+          </a:solidFill>
+          <a:ln>
+            <a:noFill/>
+          </a:ln>
+          <a:effectLst/>
+        </p:spPr>
+        <p:style>
+          <a:lnRef idx="1">
+            <a:schemeClr val="accent1"/>
+          </a:lnRef>
+          <a:fillRef idx="3">
+            <a:schemeClr val="accent1"/>
+          </a:fillRef>
+          <a:effectRef idx="2">
+            <a:schemeClr val="accent1"/>
+          </a:effectRef>
+          <a:fontRef idx="minor">
+            <a:schemeClr val="lt1"/>
+          </a:fontRef>
+        </p:style>
+        <p:txBody>
+          <a:bodyPr rtlCol="0" anchor="ctr"/>
+          <a:lstStyle/>
+          <a:p>
+            <a:pPr algn="ctr"/>
+          </a:p>
+        </p:txBody>
+      </p:sp>
+      <p:sp>
+        <p:nvSpPr>
+          <p:cNvPr id="5" name="TextBox 4"/>
+          <p:cNvSpPr txBox="1"/>
+          <p:nvPr/>
+        </p:nvSpPr>
+        <p:spPr>
+          <a:xfrm>
+            <a:off x="685800" y="2148840"/>
+            <a:ext cx="502920" cy="502920"/>
+          </a:xfrm>
+          <a:prstGeom prst="rect">
+            <a:avLst/>
+          </a:prstGeom>
+          <a:noFill/>
+        </p:spPr>
+        <p:txBody>
+          <a:bodyPr wrap="square" anchor="ctr" lIns="0" rIns="0" tIns="0" bIns="0">
+            <a:spAutoFit/>
+          </a:bodyPr>
+          <a:lstStyle/>
+          <a:p>
+            <a:pPr algn="ctr">
+              <a:lnSpc>
+                <a:spcPct val="120000"/>
+              </a:lnSpc>
+            </a:pPr>
+            <a:r>
+              <a:rPr sz="1800" b="0" i="0">
+                <a:solidFill>
+                  <a:srgbClr val="17140F"/>
+                </a:solidFill>
+                <a:latin typeface="Arial Black"/>
+              </a:rPr>
+              <a:t>1</a:t>
+            </a:r>
+          </a:p>
+        </p:txBody>
+      </p:sp>
+      <p:sp>
+        <p:nvSpPr>
+          <p:cNvPr id="6" name="TextBox 5"/>
+          <p:cNvSpPr txBox="1"/>
+          <p:nvPr/>
+        </p:nvSpPr>
+        <p:spPr>
+          <a:xfrm>
+            <a:off x="685800" y="2834640"/>
+            <a:ext cx="3200400" cy="640080"/>
+          </a:xfrm>
+          <a:prstGeom prst="rect">
+            <a:avLst/>
+          </a:prstGeom>
+          <a:noFill/>
+        </p:spPr>
+        <p:txBody>
+          <a:bodyPr wrap="square" anchor="t" lIns="0" rIns="0" tIns="0" bIns="0">
+            <a:spAutoFit/>
+          </a:bodyPr>
+          <a:lstStyle/>
+          <a:p>
+            <a:pPr algn="l">
+              <a:lnSpc>
+                <a:spcPct val="130000"/>
+              </a:lnSpc>
+            </a:pPr>
+            <a:r>
+              <a:rPr sz="1450" b="0" i="0">
+                <a:solidFill>
+                  <a:srgbClr val="F5EFE2"/>
+                </a:solidFill>
+                <a:latin typeface="Calibri"/>
+              </a:rPr>
+              <a:t>Open the .cbz or .cbr you already have — nothing to re-export first.</a:t>
+            </a:r>
+          </a:p>
+        </p:txBody>
+      </p:sp>
+      <p:sp>
+        <p:nvSpPr>
+          <p:cNvPr id="7" name="TextBox 6"/>
+          <p:cNvSpPr txBox="1"/>
+          <p:nvPr/>
+        </p:nvSpPr>
+        <p:spPr>
+          <a:xfrm>
+            <a:off x="850392" y="3566160"/>
+            <a:ext cx="3035808" cy="548640"/>
+          </a:xfrm>
+          <a:prstGeom prst="rect">
+            <a:avLst/>
+          </a:prstGeom>
+          <a:noFill/>
+        </p:spPr>
+        <p:txBody>
+          <a:bodyPr wrap="square" anchor="t" lIns="0" rIns="0" tIns="0" bIns="0">
+            <a:spAutoFit/>
+          </a:bodyPr>
+          <a:lstStyle/>
+          <a:p>
+            <a:pPr algn="l">
+              <a:lnSpc>
+                <a:spcPct val="120000"/>
+              </a:lnSpc>
+            </a:pPr>
+            <a:r>
+              <a:rPr sz="1300" b="0" i="0">
+                <a:solidFill>
+                  <a:srgbClr val="6FB7D9"/>
+                </a:solidFill>
+                <a:latin typeface="Calibri"/>
+              </a:rPr>
+              <a:t>—</a:t>
+            </a:r>
+          </a:p>
+        </p:txBody>
+      </p:sp>
+      <p:sp>
+        <p:nvSpPr>
+          <p:cNvPr id="8" name="TextBox 7"/>
+          <p:cNvSpPr txBox="1"/>
+          <p:nvPr/>
+        </p:nvSpPr>
+        <p:spPr>
+          <a:xfrm>
+            <a:off x="1069848" y="3566160"/>
+            <a:ext cx="2816352" cy="548640"/>
+          </a:xfrm>
+          <a:prstGeom prst="rect">
+            <a:avLst/>
+          </a:prstGeom>
+          <a:noFill/>
+        </p:spPr>
+        <p:txBody>
+          <a:bodyPr wrap="square" anchor="t" lIns="0" rIns="0" tIns="0" bIns="0">
+            <a:spAutoFit/>
+          </a:bodyPr>
+          <a:lstStyle/>
+          <a:p>
+            <a:pPr algn="l">
+              <a:lnSpc>
+                <a:spcPct val="125000"/>
+              </a:lnSpc>
+            </a:pPr>
+            <a:r>
+              <a:rPr sz="1300" b="0" i="0">
+                <a:solidFill>
+                  <a:srgbClr val="A79A85"/>
+                </a:solidFill>
+                <a:latin typeface="Calibri"/>
+              </a:rPr>
+              <a:t>An on-device model reads the page and outlines every panel</a:t>
+            </a:r>
+          </a:p>
+        </p:txBody>
+      </p:sp>
+      <p:sp>
+        <p:nvSpPr>
+          <p:cNvPr id="9" name="TextBox 8"/>
+          <p:cNvSpPr txBox="1"/>
+          <p:nvPr/>
+        </p:nvSpPr>
+        <p:spPr>
+          <a:xfrm>
+            <a:off x="850392" y="4133088"/>
+            <a:ext cx="3035808" cy="548640"/>
+          </a:xfrm>
+          <a:prstGeom prst="rect">
+            <a:avLst/>
+          </a:prstGeom>
+          <a:noFill/>
+        </p:spPr>
+        <p:txBody>
+          <a:bodyPr wrap="square" anchor="t" lIns="0" rIns="0" tIns="0" bIns="0">
+            <a:spAutoFit/>
+          </a:bodyPr>
+          <a:lstStyle/>
+          <a:p>
+            <a:pPr algn="l">
+              <a:lnSpc>
+                <a:spcPct val="120000"/>
+              </a:lnSpc>
+            </a:pPr>
+            <a:r>
+              <a:rPr sz="1300" b="0" i="0">
+                <a:solidFill>
+                  <a:srgbClr val="6FB7D9"/>
+                </a:solidFill>
+                <a:latin typeface="Calibri"/>
+              </a:rPr>
+              <a:t>—</a:t>
+            </a:r>
+          </a:p>
+        </p:txBody>
+      </p:sp>
+      <p:sp>
+        <p:nvSpPr>
+          <p:cNvPr id="10" name="TextBox 9"/>
+          <p:cNvSpPr txBox="1"/>
+          <p:nvPr/>
+        </p:nvSpPr>
+        <p:spPr>
+          <a:xfrm>
+            <a:off x="1069848" y="4133088"/>
+            <a:ext cx="2816352" cy="548640"/>
+          </a:xfrm>
+          <a:prstGeom prst="rect">
+            <a:avLst/>
+          </a:prstGeom>
+          <a:noFill/>
+        </p:spPr>
+        <p:txBody>
+          <a:bodyPr wrap="square" anchor="t" lIns="0" rIns="0" tIns="0" bIns="0">
+            <a:spAutoFit/>
+          </a:bodyPr>
+          <a:lstStyle/>
+          <a:p>
+            <a:pPr algn="l">
+              <a:lnSpc>
+                <a:spcPct val="125000"/>
+              </a:lnSpc>
+            </a:pPr>
+            <a:r>
+              <a:rPr sz="1300" b="0" i="0">
+                <a:solidFill>
+                  <a:srgbClr val="A79A85"/>
+                </a:solidFill>
+                <a:latin typeface="Calibri"/>
+              </a:rPr>
+              <a:t>This page: 6 panels found and numbered in under two seconds</a:t>
+            </a:r>
+          </a:p>
+        </p:txBody>
+      </p:sp>
+      <p:sp>
+        <p:nvSpPr>
+          <p:cNvPr id="11" name="TextBox 10"/>
+          <p:cNvSpPr txBox="1"/>
+          <p:nvPr/>
+        </p:nvSpPr>
+        <p:spPr>
+          <a:xfrm>
+            <a:off x="850392" y="4700016"/>
+            <a:ext cx="3035808" cy="548640"/>
+          </a:xfrm>
+          <a:prstGeom prst="rect">
+            <a:avLst/>
+          </a:prstGeom>
+          <a:noFill/>
+        </p:spPr>
+        <p:txBody>
+          <a:bodyPr wrap="square" anchor="t" lIns="0" rIns="0" tIns="0" bIns="0">
+            <a:spAutoFit/>
+          </a:bodyPr>
+          <a:lstStyle/>
+          <a:p>
+            <a:pPr algn="l">
+              <a:lnSpc>
+                <a:spcPct val="120000"/>
+              </a:lnSpc>
+            </a:pPr>
+            <a:r>
+              <a:rPr sz="1300" b="0" i="0">
+                <a:solidFill>
+                  <a:srgbClr val="6FB7D9"/>
+                </a:solidFill>
+                <a:latin typeface="Calibri"/>
+              </a:rPr>
+              <a:t>—</a:t>
+            </a:r>
+          </a:p>
+        </p:txBody>
+      </p:sp>
+      <p:sp>
+        <p:nvSpPr>
+          <p:cNvPr id="12" name="TextBox 11"/>
+          <p:cNvSpPr txBox="1"/>
+          <p:nvPr/>
+        </p:nvSpPr>
+        <p:spPr>
+          <a:xfrm>
+            <a:off x="1069848" y="4700016"/>
+            <a:ext cx="2816352" cy="548640"/>
+          </a:xfrm>
+          <a:prstGeom prst="rect">
+            <a:avLst/>
+          </a:prstGeom>
+          <a:noFill/>
+        </p:spPr>
+        <p:txBody>
+          <a:bodyPr wrap="square" anchor="t" lIns="0" rIns="0" tIns="0" bIns="0">
+            <a:spAutoFit/>
+          </a:bodyPr>
+          <a:lstStyle/>
+          <a:p>
+            <a:pPr algn="l">
+              <a:lnSpc>
+                <a:spcPct val="125000"/>
+              </a:lnSpc>
+            </a:pPr>
+            <a:r>
+              <a:rPr sz="1300" b="0" i="0">
+                <a:solidFill>
+                  <a:srgbClr val="A79A85"/>
+                </a:solidFill>
+                <a:latin typeface="Calibri"/>
+              </a:rPr>
+              <a:t>No file ever leaves the browser</a:t>
+            </a:r>
+          </a:p>
+        </p:txBody>
+      </p:sp>
+      <p:sp>
+        <p:nvSpPr>
+          <p:cNvPr id="13" name="Rounded Rectangle 12"/>
+          <p:cNvSpPr/>
+          <p:nvPr/>
+        </p:nvSpPr>
+        <p:spPr>
+          <a:xfrm>
+            <a:off x="4434840" y="2148840"/>
+            <a:ext cx="7040880" cy="4160520"/>
+          </a:xfrm>
+          <a:prstGeom prst="roundRect">
+            <a:avLst>
+              <a:gd name="adj" fmla="val 4000"/>
+            </a:avLst>
+          </a:prstGeom>
+          <a:solidFill>
+            <a:srgbClr val="211C15"/>
+          </a:solidFill>
+          <a:ln w="9525">
+            <a:solidFill>
+              <a:srgbClr val="3A3225"/>
+            </a:solidFill>
+          </a:ln>
+          <a:effectLst/>
+        </p:spPr>
+        <p:style>
+          <a:lnRef idx="1">
+            <a:schemeClr val="accent1"/>
+          </a:lnRef>
+          <a:fillRef idx="3">
+            <a:schemeClr val="accent1"/>
+          </a:fillRef>
+          <a:effectRef idx="2">
+            <a:schemeClr val="accent1"/>
+          </a:effectRef>
+          <a:fontRef idx="minor">
+            <a:schemeClr val="lt1"/>
+          </a:fontRef>
+        </p:style>
+        <p:txBody>
+          <a:bodyPr rtlCol="0" anchor="ctr"/>
+          <a:lstStyle/>
+          <a:p>
+            <a:pPr algn="ctr"/>
+          </a:p>
+        </p:txBody>
+      </p:sp>
       <p:pic>
         <p:nvPicPr>
-          <p:cNvPr id="2" name="Picture 1" descr="slide-04.png"/>
+          <p:cNvPr id="14" name="Picture 13" descr="editor-detect.jpg"/>
           <p:cNvPicPr>
             <a:picLocks noChangeAspect="1"/>
           </p:cNvPicPr>
@@ -3237,14 +5546,190 @@
         </p:blipFill>
         <p:spPr>
           <a:xfrm>
-            <a:off x="0" y="0"/>
-            <a:ext cx="12191695" cy="6858000"/>
+            <a:off x="4802428" y="2258568"/>
+            <a:ext cx="6305702" cy="3941063"/>
           </a:xfrm>
           <a:prstGeom prst="rect">
             <a:avLst/>
           </a:prstGeom>
         </p:spPr>
       </p:pic>
+      <p:sp>
+        <p:nvSpPr>
+          <p:cNvPr id="15" name="Rectangle 14"/>
+          <p:cNvSpPr/>
+          <p:nvPr/>
+        </p:nvSpPr>
+        <p:spPr>
+          <a:xfrm>
+            <a:off x="4434840" y="6296660"/>
+            <a:ext cx="128015" cy="12700"/>
+          </a:xfrm>
+          <a:prstGeom prst="rect">
+            <a:avLst/>
+          </a:prstGeom>
+          <a:solidFill>
+            <a:srgbClr val="6FB7D9"/>
+          </a:solidFill>
+          <a:ln>
+            <a:noFill/>
+          </a:ln>
+          <a:effectLst/>
+        </p:spPr>
+        <p:style>
+          <a:lnRef idx="1">
+            <a:schemeClr val="accent1"/>
+          </a:lnRef>
+          <a:fillRef idx="3">
+            <a:schemeClr val="accent1"/>
+          </a:fillRef>
+          <a:effectRef idx="2">
+            <a:schemeClr val="accent1"/>
+          </a:effectRef>
+          <a:fontRef idx="minor">
+            <a:schemeClr val="lt1"/>
+          </a:fontRef>
+        </p:style>
+        <p:txBody>
+          <a:bodyPr rtlCol="0" anchor="ctr"/>
+          <a:lstStyle/>
+          <a:p>
+            <a:pPr algn="ctr"/>
+          </a:p>
+        </p:txBody>
+      </p:sp>
+      <p:sp>
+        <p:nvSpPr>
+          <p:cNvPr id="16" name="Rectangle 15"/>
+          <p:cNvSpPr/>
+          <p:nvPr/>
+        </p:nvSpPr>
+        <p:spPr>
+          <a:xfrm>
+            <a:off x="4422139" y="6181344"/>
+            <a:ext cx="12700" cy="128015"/>
+          </a:xfrm>
+          <a:prstGeom prst="rect">
+            <a:avLst/>
+          </a:prstGeom>
+          <a:solidFill>
+            <a:srgbClr val="6FB7D9"/>
+          </a:solidFill>
+          <a:ln>
+            <a:noFill/>
+          </a:ln>
+          <a:effectLst/>
+        </p:spPr>
+        <p:style>
+          <a:lnRef idx="1">
+            <a:schemeClr val="accent1"/>
+          </a:lnRef>
+          <a:fillRef idx="3">
+            <a:schemeClr val="accent1"/>
+          </a:fillRef>
+          <a:effectRef idx="2">
+            <a:schemeClr val="accent1"/>
+          </a:effectRef>
+          <a:fontRef idx="minor">
+            <a:schemeClr val="lt1"/>
+          </a:fontRef>
+        </p:style>
+        <p:txBody>
+          <a:bodyPr rtlCol="0" anchor="ctr"/>
+          <a:lstStyle/>
+          <a:p>
+            <a:pPr algn="ctr"/>
+          </a:p>
+        </p:txBody>
+      </p:sp>
+      <p:sp>
+        <p:nvSpPr>
+          <p:cNvPr id="17" name="Rectangle 16"/>
+          <p:cNvSpPr/>
+          <p:nvPr/>
+        </p:nvSpPr>
+        <p:spPr>
+          <a:xfrm>
+            <a:off x="11347704" y="6296660"/>
+            <a:ext cx="128016" cy="12700"/>
+          </a:xfrm>
+          <a:prstGeom prst="rect">
+            <a:avLst/>
+          </a:prstGeom>
+          <a:solidFill>
+            <a:srgbClr val="6FB7D9"/>
+          </a:solidFill>
+          <a:ln>
+            <a:noFill/>
+          </a:ln>
+          <a:effectLst/>
+        </p:spPr>
+        <p:style>
+          <a:lnRef idx="1">
+            <a:schemeClr val="accent1"/>
+          </a:lnRef>
+          <a:fillRef idx="3">
+            <a:schemeClr val="accent1"/>
+          </a:fillRef>
+          <a:effectRef idx="2">
+            <a:schemeClr val="accent1"/>
+          </a:effectRef>
+          <a:fontRef idx="minor">
+            <a:schemeClr val="lt1"/>
+          </a:fontRef>
+        </p:style>
+        <p:txBody>
+          <a:bodyPr rtlCol="0" anchor="ctr"/>
+          <a:lstStyle/>
+          <a:p>
+            <a:pPr algn="ctr"/>
+          </a:p>
+        </p:txBody>
+      </p:sp>
+      <p:sp>
+        <p:nvSpPr>
+          <p:cNvPr id="18" name="Rectangle 17"/>
+          <p:cNvSpPr/>
+          <p:nvPr/>
+        </p:nvSpPr>
+        <p:spPr>
+          <a:xfrm>
+            <a:off x="11463020" y="6181344"/>
+            <a:ext cx="12700" cy="128015"/>
+          </a:xfrm>
+          <a:prstGeom prst="rect">
+            <a:avLst/>
+          </a:prstGeom>
+          <a:solidFill>
+            <a:srgbClr val="6FB7D9"/>
+          </a:solidFill>
+          <a:ln>
+            <a:noFill/>
+          </a:ln>
+          <a:effectLst/>
+        </p:spPr>
+        <p:style>
+          <a:lnRef idx="1">
+            <a:schemeClr val="accent1"/>
+          </a:lnRef>
+          <a:fillRef idx="3">
+            <a:schemeClr val="accent1"/>
+          </a:fillRef>
+          <a:effectRef idx="2">
+            <a:schemeClr val="accent1"/>
+          </a:effectRef>
+          <a:fontRef idx="minor">
+            <a:schemeClr val="lt1"/>
+          </a:fontRef>
+        </p:style>
+        <p:txBody>
+          <a:bodyPr rtlCol="0" anchor="ctr"/>
+          <a:lstStyle/>
+          <a:p>
+            <a:pPr algn="ctr"/>
+          </a:p>
+        </p:txBody>
+      </p:sp>
     </p:spTree>
   </p:cSld>
   <p:clrMapOvr>
@@ -3256,6 +5741,14 @@
 <file path=ppt/slides/slide5.xml><?xml version="1.0" encoding="utf-8"?>
 <p:sld xmlns:a="http://schemas.openxmlformats.org/drawingml/2006/main" xmlns:p="http://schemas.openxmlformats.org/presentationml/2006/main" xmlns:r="http://schemas.openxmlformats.org/officeDocument/2006/relationships">
   <p:cSld>
+    <p:bg>
+      <p:bgPr>
+        <a:solidFill>
+          <a:srgbClr val="17140F"/>
+        </a:solidFill>
+        <a:effectLst/>
+      </p:bgPr>
+    </p:bg>
     <p:spTree>
       <p:nvGrpSpPr>
         <p:cNvPr id="1" name=""/>
@@ -3263,9 +5756,491 @@
         <p:nvPr/>
       </p:nvGrpSpPr>
       <p:grpSpPr/>
+      <p:sp>
+        <p:nvSpPr>
+          <p:cNvPr id="2" name="TextBox 1"/>
+          <p:cNvSpPr txBox="1"/>
+          <p:nvPr/>
+        </p:nvSpPr>
+        <p:spPr>
+          <a:xfrm>
+            <a:off x="685800" y="457200"/>
+            <a:ext cx="7315200" cy="320040"/>
+          </a:xfrm>
+          <a:prstGeom prst="rect">
+            <a:avLst/>
+          </a:prstGeom>
+          <a:noFill/>
+        </p:spPr>
+        <p:txBody>
+          <a:bodyPr wrap="square" anchor="t" lIns="0" rIns="0" tIns="0" bIns="0">
+            <a:spAutoFit/>
+          </a:bodyPr>
+          <a:lstStyle/>
+          <a:p>
+            <a:pPr algn="l">
+              <a:lnSpc>
+                <a:spcPct val="120000"/>
+              </a:lnSpc>
+            </a:pPr>
+            <a:r>
+              <a:rPr sz="1200" b="0" i="0" spc="120">
+                <a:solidFill>
+                  <a:srgbClr val="6FB7D9"/>
+                </a:solidFill>
+                <a:latin typeface="Consolas"/>
+              </a:rPr>
+              <a:t>STEP 2 OF 3</a:t>
+            </a:r>
+          </a:p>
+        </p:txBody>
+      </p:sp>
+      <p:sp>
+        <p:nvSpPr>
+          <p:cNvPr id="3" name="TextBox 2"/>
+          <p:cNvSpPr txBox="1"/>
+          <p:nvPr/>
+        </p:nvSpPr>
+        <p:spPr>
+          <a:xfrm>
+            <a:off x="685800" y="841248"/>
+            <a:ext cx="9601200" cy="1097280"/>
+          </a:xfrm>
+          <a:prstGeom prst="rect">
+            <a:avLst/>
+          </a:prstGeom>
+          <a:noFill/>
+        </p:spPr>
+        <p:txBody>
+          <a:bodyPr wrap="square" anchor="t" lIns="0" rIns="0" tIns="0" bIns="0">
+            <a:spAutoFit/>
+          </a:bodyPr>
+          <a:lstStyle/>
+          <a:p>
+            <a:pPr algn="l">
+              <a:lnSpc>
+                <a:spcPct val="100000"/>
+              </a:lnSpc>
+            </a:pPr>
+            <a:r>
+              <a:rPr sz="3000" b="0" i="0">
+                <a:solidFill>
+                  <a:srgbClr val="F4C563"/>
+                </a:solidFill>
+                <a:latin typeface="Arial Black"/>
+              </a:rPr>
+              <a:t>CORRECT THE DRAFT</a:t>
+            </a:r>
+          </a:p>
+        </p:txBody>
+      </p:sp>
+      <p:sp>
+        <p:nvSpPr>
+          <p:cNvPr id="4" name="Oval 3"/>
+          <p:cNvSpPr/>
+          <p:nvPr/>
+        </p:nvSpPr>
+        <p:spPr>
+          <a:xfrm>
+            <a:off x="685800" y="2148840"/>
+            <a:ext cx="502920" cy="502920"/>
+          </a:xfrm>
+          <a:prstGeom prst="ellipse">
+            <a:avLst/>
+          </a:prstGeom>
+          <a:solidFill>
+            <a:srgbClr val="E8A93C"/>
+          </a:solidFill>
+          <a:ln>
+            <a:noFill/>
+          </a:ln>
+          <a:effectLst/>
+        </p:spPr>
+        <p:style>
+          <a:lnRef idx="1">
+            <a:schemeClr val="accent1"/>
+          </a:lnRef>
+          <a:fillRef idx="3">
+            <a:schemeClr val="accent1"/>
+          </a:fillRef>
+          <a:effectRef idx="2">
+            <a:schemeClr val="accent1"/>
+          </a:effectRef>
+          <a:fontRef idx="minor">
+            <a:schemeClr val="lt1"/>
+          </a:fontRef>
+        </p:style>
+        <p:txBody>
+          <a:bodyPr rtlCol="0" anchor="ctr"/>
+          <a:lstStyle/>
+          <a:p>
+            <a:pPr algn="ctr"/>
+          </a:p>
+        </p:txBody>
+      </p:sp>
+      <p:sp>
+        <p:nvSpPr>
+          <p:cNvPr id="5" name="TextBox 4"/>
+          <p:cNvSpPr txBox="1"/>
+          <p:nvPr/>
+        </p:nvSpPr>
+        <p:spPr>
+          <a:xfrm>
+            <a:off x="685800" y="2148840"/>
+            <a:ext cx="502920" cy="502920"/>
+          </a:xfrm>
+          <a:prstGeom prst="rect">
+            <a:avLst/>
+          </a:prstGeom>
+          <a:noFill/>
+        </p:spPr>
+        <p:txBody>
+          <a:bodyPr wrap="square" anchor="ctr" lIns="0" rIns="0" tIns="0" bIns="0">
+            <a:spAutoFit/>
+          </a:bodyPr>
+          <a:lstStyle/>
+          <a:p>
+            <a:pPr algn="ctr">
+              <a:lnSpc>
+                <a:spcPct val="120000"/>
+              </a:lnSpc>
+            </a:pPr>
+            <a:r>
+              <a:rPr sz="1800" b="0" i="0">
+                <a:solidFill>
+                  <a:srgbClr val="17140F"/>
+                </a:solidFill>
+                <a:latin typeface="Arial Black"/>
+              </a:rPr>
+              <a:t>2</a:t>
+            </a:r>
+          </a:p>
+        </p:txBody>
+      </p:sp>
+      <p:sp>
+        <p:nvSpPr>
+          <p:cNvPr id="6" name="TextBox 5"/>
+          <p:cNvSpPr txBox="1"/>
+          <p:nvPr/>
+        </p:nvSpPr>
+        <p:spPr>
+          <a:xfrm>
+            <a:off x="685800" y="2834640"/>
+            <a:ext cx="3200400" cy="640080"/>
+          </a:xfrm>
+          <a:prstGeom prst="rect">
+            <a:avLst/>
+          </a:prstGeom>
+          <a:noFill/>
+        </p:spPr>
+        <p:txBody>
+          <a:bodyPr wrap="square" anchor="t" lIns="0" rIns="0" tIns="0" bIns="0">
+            <a:spAutoFit/>
+          </a:bodyPr>
+          <a:lstStyle/>
+          <a:p>
+            <a:pPr algn="l">
+              <a:lnSpc>
+                <a:spcPct val="130000"/>
+              </a:lnSpc>
+            </a:pPr>
+            <a:r>
+              <a:rPr sz="1450" b="0" i="0">
+                <a:solidFill>
+                  <a:srgbClr val="F5EFE2"/>
+                </a:solidFill>
+                <a:latin typeface="Calibri"/>
+              </a:rPr>
+              <a:t>Every panel is a shape, not just a box.</a:t>
+            </a:r>
+          </a:p>
+        </p:txBody>
+      </p:sp>
+      <p:sp>
+        <p:nvSpPr>
+          <p:cNvPr id="7" name="TextBox 6"/>
+          <p:cNvSpPr txBox="1"/>
+          <p:nvPr/>
+        </p:nvSpPr>
+        <p:spPr>
+          <a:xfrm>
+            <a:off x="850392" y="3566160"/>
+            <a:ext cx="3035808" cy="548640"/>
+          </a:xfrm>
+          <a:prstGeom prst="rect">
+            <a:avLst/>
+          </a:prstGeom>
+          <a:noFill/>
+        </p:spPr>
+        <p:txBody>
+          <a:bodyPr wrap="square" anchor="t" lIns="0" rIns="0" tIns="0" bIns="0">
+            <a:spAutoFit/>
+          </a:bodyPr>
+          <a:lstStyle/>
+          <a:p>
+            <a:pPr algn="l">
+              <a:lnSpc>
+                <a:spcPct val="120000"/>
+              </a:lnSpc>
+            </a:pPr>
+            <a:r>
+              <a:rPr sz="1300" b="0" i="0">
+                <a:solidFill>
+                  <a:srgbClr val="6FB7D9"/>
+                </a:solidFill>
+                <a:latin typeface="Calibri"/>
+              </a:rPr>
+              <a:t>—</a:t>
+            </a:r>
+          </a:p>
+        </p:txBody>
+      </p:sp>
+      <p:sp>
+        <p:nvSpPr>
+          <p:cNvPr id="8" name="TextBox 7"/>
+          <p:cNvSpPr txBox="1"/>
+          <p:nvPr/>
+        </p:nvSpPr>
+        <p:spPr>
+          <a:xfrm>
+            <a:off x="1069848" y="3566160"/>
+            <a:ext cx="2816352" cy="548640"/>
+          </a:xfrm>
+          <a:prstGeom prst="rect">
+            <a:avLst/>
+          </a:prstGeom>
+          <a:noFill/>
+        </p:spPr>
+        <p:txBody>
+          <a:bodyPr wrap="square" anchor="t" lIns="0" rIns="0" tIns="0" bIns="0">
+            <a:spAutoFit/>
+          </a:bodyPr>
+          <a:lstStyle/>
+          <a:p>
+            <a:pPr algn="l">
+              <a:lnSpc>
+                <a:spcPct val="125000"/>
+              </a:lnSpc>
+            </a:pPr>
+            <a:r>
+              <a:rPr sz="1300" b="0" i="0">
+                <a:solidFill>
+                  <a:srgbClr val="A79A85"/>
+                </a:solidFill>
+                <a:latin typeface="Calibri"/>
+              </a:rPr>
+              <a:t>Drag a corner to resize, an edge to trace an angled border</a:t>
+            </a:r>
+          </a:p>
+        </p:txBody>
+      </p:sp>
+      <p:sp>
+        <p:nvSpPr>
+          <p:cNvPr id="9" name="TextBox 8"/>
+          <p:cNvSpPr txBox="1"/>
+          <p:nvPr/>
+        </p:nvSpPr>
+        <p:spPr>
+          <a:xfrm>
+            <a:off x="850392" y="4133088"/>
+            <a:ext cx="3035808" cy="548640"/>
+          </a:xfrm>
+          <a:prstGeom prst="rect">
+            <a:avLst/>
+          </a:prstGeom>
+          <a:noFill/>
+        </p:spPr>
+        <p:txBody>
+          <a:bodyPr wrap="square" anchor="t" lIns="0" rIns="0" tIns="0" bIns="0">
+            <a:spAutoFit/>
+          </a:bodyPr>
+          <a:lstStyle/>
+          <a:p>
+            <a:pPr algn="l">
+              <a:lnSpc>
+                <a:spcPct val="120000"/>
+              </a:lnSpc>
+            </a:pPr>
+            <a:r>
+              <a:rPr sz="1300" b="0" i="0">
+                <a:solidFill>
+                  <a:srgbClr val="6FB7D9"/>
+                </a:solidFill>
+                <a:latin typeface="Calibri"/>
+              </a:rPr>
+              <a:t>—</a:t>
+            </a:r>
+          </a:p>
+        </p:txBody>
+      </p:sp>
+      <p:sp>
+        <p:nvSpPr>
+          <p:cNvPr id="10" name="TextBox 9"/>
+          <p:cNvSpPr txBox="1"/>
+          <p:nvPr/>
+        </p:nvSpPr>
+        <p:spPr>
+          <a:xfrm>
+            <a:off x="1069848" y="4133088"/>
+            <a:ext cx="2816352" cy="548640"/>
+          </a:xfrm>
+          <a:prstGeom prst="rect">
+            <a:avLst/>
+          </a:prstGeom>
+          <a:noFill/>
+        </p:spPr>
+        <p:txBody>
+          <a:bodyPr wrap="square" anchor="t" lIns="0" rIns="0" tIns="0" bIns="0">
+            <a:spAutoFit/>
+          </a:bodyPr>
+          <a:lstStyle/>
+          <a:p>
+            <a:pPr algn="l">
+              <a:lnSpc>
+                <a:spcPct val="125000"/>
+              </a:lnSpc>
+            </a:pPr>
+            <a:r>
+              <a:rPr sz="1300" b="0" i="0">
+                <a:solidFill>
+                  <a:srgbClr val="A79A85"/>
+                </a:solidFill>
+                <a:latin typeface="Calibri"/>
+              </a:rPr>
+              <a:t>Add, delete, or redraw a panel from scratch</a:t>
+            </a:r>
+          </a:p>
+        </p:txBody>
+      </p:sp>
+      <p:sp>
+        <p:nvSpPr>
+          <p:cNvPr id="11" name="TextBox 10"/>
+          <p:cNvSpPr txBox="1"/>
+          <p:nvPr/>
+        </p:nvSpPr>
+        <p:spPr>
+          <a:xfrm>
+            <a:off x="850392" y="4700016"/>
+            <a:ext cx="3035808" cy="548640"/>
+          </a:xfrm>
+          <a:prstGeom prst="rect">
+            <a:avLst/>
+          </a:prstGeom>
+          <a:noFill/>
+        </p:spPr>
+        <p:txBody>
+          <a:bodyPr wrap="square" anchor="t" lIns="0" rIns="0" tIns="0" bIns="0">
+            <a:spAutoFit/>
+          </a:bodyPr>
+          <a:lstStyle/>
+          <a:p>
+            <a:pPr algn="l">
+              <a:lnSpc>
+                <a:spcPct val="120000"/>
+              </a:lnSpc>
+            </a:pPr>
+            <a:r>
+              <a:rPr sz="1300" b="0" i="0">
+                <a:solidFill>
+                  <a:srgbClr val="6FB7D9"/>
+                </a:solidFill>
+                <a:latin typeface="Calibri"/>
+              </a:rPr>
+              <a:t>—</a:t>
+            </a:r>
+          </a:p>
+        </p:txBody>
+      </p:sp>
+      <p:sp>
+        <p:nvSpPr>
+          <p:cNvPr id="12" name="TextBox 11"/>
+          <p:cNvSpPr txBox="1"/>
+          <p:nvPr/>
+        </p:nvSpPr>
+        <p:spPr>
+          <a:xfrm>
+            <a:off x="1069848" y="4700016"/>
+            <a:ext cx="2816352" cy="548640"/>
+          </a:xfrm>
+          <a:prstGeom prst="rect">
+            <a:avLst/>
+          </a:prstGeom>
+          <a:noFill/>
+        </p:spPr>
+        <p:txBody>
+          <a:bodyPr wrap="square" anchor="t" lIns="0" rIns="0" tIns="0" bIns="0">
+            <a:spAutoFit/>
+          </a:bodyPr>
+          <a:lstStyle/>
+          <a:p>
+            <a:pPr algn="l">
+              <a:lnSpc>
+                <a:spcPct val="125000"/>
+              </a:lnSpc>
+            </a:pPr>
+            <a:r>
+              <a:rPr sz="1300" b="0" i="0">
+                <a:solidFill>
+                  <a:srgbClr val="A79A85"/>
+                </a:solidFill>
+                <a:latin typeface="Calibri"/>
+              </a:rPr>
+              <a:t>Drag panels in the list to fix reading order</a:t>
+            </a:r>
+          </a:p>
+        </p:txBody>
+      </p:sp>
+      <p:sp>
+        <p:nvSpPr>
+          <p:cNvPr id="13" name="Rounded Rectangle 12"/>
+          <p:cNvSpPr/>
+          <p:nvPr/>
+        </p:nvSpPr>
+        <p:spPr>
+          <a:xfrm>
+            <a:off x="4434840" y="2148840"/>
+            <a:ext cx="7040880" cy="4160520"/>
+          </a:xfrm>
+          <a:prstGeom prst="roundRect">
+            <a:avLst>
+              <a:gd name="adj" fmla="val 4000"/>
+            </a:avLst>
+          </a:prstGeom>
+          <a:solidFill>
+            <a:srgbClr val="211C15"/>
+          </a:solidFill>
+          <a:ln w="9525">
+            <a:solidFill>
+              <a:srgbClr val="3A3225"/>
+            </a:solidFill>
+          </a:ln>
+          <a:effectLst/>
+        </p:spPr>
+        <p:style>
+          <a:lnRef idx="1">
+            <a:schemeClr val="accent1"/>
+          </a:lnRef>
+          <a:fillRef idx="3">
+            <a:schemeClr val="accent1"/>
+          </a:fillRef>
+          <a:effectRef idx="2">
+            <a:schemeClr val="accent1"/>
+          </a:effectRef>
+          <a:fontRef idx="minor">
+            <a:schemeClr val="lt1"/>
+          </a:fontRef>
+        </p:style>
+        <p:txBody>
+          <a:bodyPr rtlCol="0" anchor="ctr"/>
+          <a:lstStyle/>
+          <a:p>
+            <a:pPr algn="ctr"/>
+          </a:p>
+        </p:txBody>
+      </p:sp>
       <p:pic>
         <p:nvPicPr>
-          <p:cNvPr id="2" name="Picture 1" descr="slide-05.png"/>
+          <p:cNvPr id="14" name="Picture 13" descr="editor-polygon.jpg"/>
           <p:cNvPicPr>
             <a:picLocks noChangeAspect="1"/>
           </p:cNvPicPr>
@@ -3279,14 +6254,190 @@
         </p:blipFill>
         <p:spPr>
           <a:xfrm>
-            <a:off x="0" y="0"/>
-            <a:ext cx="12191695" cy="6858000"/>
+            <a:off x="4802428" y="2258568"/>
+            <a:ext cx="6305702" cy="3941063"/>
           </a:xfrm>
           <a:prstGeom prst="rect">
             <a:avLst/>
           </a:prstGeom>
         </p:spPr>
       </p:pic>
+      <p:sp>
+        <p:nvSpPr>
+          <p:cNvPr id="15" name="Rectangle 14"/>
+          <p:cNvSpPr/>
+          <p:nvPr/>
+        </p:nvSpPr>
+        <p:spPr>
+          <a:xfrm>
+            <a:off x="4434840" y="6296660"/>
+            <a:ext cx="128015" cy="12700"/>
+          </a:xfrm>
+          <a:prstGeom prst="rect">
+            <a:avLst/>
+          </a:prstGeom>
+          <a:solidFill>
+            <a:srgbClr val="6FB7D9"/>
+          </a:solidFill>
+          <a:ln>
+            <a:noFill/>
+          </a:ln>
+          <a:effectLst/>
+        </p:spPr>
+        <p:style>
+          <a:lnRef idx="1">
+            <a:schemeClr val="accent1"/>
+          </a:lnRef>
+          <a:fillRef idx="3">
+            <a:schemeClr val="accent1"/>
+          </a:fillRef>
+          <a:effectRef idx="2">
+            <a:schemeClr val="accent1"/>
+          </a:effectRef>
+          <a:fontRef idx="minor">
+            <a:schemeClr val="lt1"/>
+          </a:fontRef>
+        </p:style>
+        <p:txBody>
+          <a:bodyPr rtlCol="0" anchor="ctr"/>
+          <a:lstStyle/>
+          <a:p>
+            <a:pPr algn="ctr"/>
+          </a:p>
+        </p:txBody>
+      </p:sp>
+      <p:sp>
+        <p:nvSpPr>
+          <p:cNvPr id="16" name="Rectangle 15"/>
+          <p:cNvSpPr/>
+          <p:nvPr/>
+        </p:nvSpPr>
+        <p:spPr>
+          <a:xfrm>
+            <a:off x="4422139" y="6181344"/>
+            <a:ext cx="12700" cy="128015"/>
+          </a:xfrm>
+          <a:prstGeom prst="rect">
+            <a:avLst/>
+          </a:prstGeom>
+          <a:solidFill>
+            <a:srgbClr val="6FB7D9"/>
+          </a:solidFill>
+          <a:ln>
+            <a:noFill/>
+          </a:ln>
+          <a:effectLst/>
+        </p:spPr>
+        <p:style>
+          <a:lnRef idx="1">
+            <a:schemeClr val="accent1"/>
+          </a:lnRef>
+          <a:fillRef idx="3">
+            <a:schemeClr val="accent1"/>
+          </a:fillRef>
+          <a:effectRef idx="2">
+            <a:schemeClr val="accent1"/>
+          </a:effectRef>
+          <a:fontRef idx="minor">
+            <a:schemeClr val="lt1"/>
+          </a:fontRef>
+        </p:style>
+        <p:txBody>
+          <a:bodyPr rtlCol="0" anchor="ctr"/>
+          <a:lstStyle/>
+          <a:p>
+            <a:pPr algn="ctr"/>
+          </a:p>
+        </p:txBody>
+      </p:sp>
+      <p:sp>
+        <p:nvSpPr>
+          <p:cNvPr id="17" name="Rectangle 16"/>
+          <p:cNvSpPr/>
+          <p:nvPr/>
+        </p:nvSpPr>
+        <p:spPr>
+          <a:xfrm>
+            <a:off x="11347704" y="6296660"/>
+            <a:ext cx="128016" cy="12700"/>
+          </a:xfrm>
+          <a:prstGeom prst="rect">
+            <a:avLst/>
+          </a:prstGeom>
+          <a:solidFill>
+            <a:srgbClr val="6FB7D9"/>
+          </a:solidFill>
+          <a:ln>
+            <a:noFill/>
+          </a:ln>
+          <a:effectLst/>
+        </p:spPr>
+        <p:style>
+          <a:lnRef idx="1">
+            <a:schemeClr val="accent1"/>
+          </a:lnRef>
+          <a:fillRef idx="3">
+            <a:schemeClr val="accent1"/>
+          </a:fillRef>
+          <a:effectRef idx="2">
+            <a:schemeClr val="accent1"/>
+          </a:effectRef>
+          <a:fontRef idx="minor">
+            <a:schemeClr val="lt1"/>
+          </a:fontRef>
+        </p:style>
+        <p:txBody>
+          <a:bodyPr rtlCol="0" anchor="ctr"/>
+          <a:lstStyle/>
+          <a:p>
+            <a:pPr algn="ctr"/>
+          </a:p>
+        </p:txBody>
+      </p:sp>
+      <p:sp>
+        <p:nvSpPr>
+          <p:cNvPr id="18" name="Rectangle 17"/>
+          <p:cNvSpPr/>
+          <p:nvPr/>
+        </p:nvSpPr>
+        <p:spPr>
+          <a:xfrm>
+            <a:off x="11463020" y="6181344"/>
+            <a:ext cx="12700" cy="128015"/>
+          </a:xfrm>
+          <a:prstGeom prst="rect">
+            <a:avLst/>
+          </a:prstGeom>
+          <a:solidFill>
+            <a:srgbClr val="6FB7D9"/>
+          </a:solidFill>
+          <a:ln>
+            <a:noFill/>
+          </a:ln>
+          <a:effectLst/>
+        </p:spPr>
+        <p:style>
+          <a:lnRef idx="1">
+            <a:schemeClr val="accent1"/>
+          </a:lnRef>
+          <a:fillRef idx="3">
+            <a:schemeClr val="accent1"/>
+          </a:fillRef>
+          <a:effectRef idx="2">
+            <a:schemeClr val="accent1"/>
+          </a:effectRef>
+          <a:fontRef idx="minor">
+            <a:schemeClr val="lt1"/>
+          </a:fontRef>
+        </p:style>
+        <p:txBody>
+          <a:bodyPr rtlCol="0" anchor="ctr"/>
+          <a:lstStyle/>
+          <a:p>
+            <a:pPr algn="ctr"/>
+          </a:p>
+        </p:txBody>
+      </p:sp>
     </p:spTree>
   </p:cSld>
   <p:clrMapOvr>
@@ -3298,6 +6449,14 @@
 <file path=ppt/slides/slide6.xml><?xml version="1.0" encoding="utf-8"?>
 <p:sld xmlns:a="http://schemas.openxmlformats.org/drawingml/2006/main" xmlns:p="http://schemas.openxmlformats.org/presentationml/2006/main" xmlns:r="http://schemas.openxmlformats.org/officeDocument/2006/relationships">
   <p:cSld>
+    <p:bg>
+      <p:bgPr>
+        <a:solidFill>
+          <a:srgbClr val="17140F"/>
+        </a:solidFill>
+        <a:effectLst/>
+      </p:bgPr>
+    </p:bg>
     <p:spTree>
       <p:nvGrpSpPr>
         <p:cNvPr id="1" name=""/>
@@ -3305,9 +6464,491 @@
         <p:nvPr/>
       </p:nvGrpSpPr>
       <p:grpSpPr/>
+      <p:sp>
+        <p:nvSpPr>
+          <p:cNvPr id="2" name="TextBox 1"/>
+          <p:cNvSpPr txBox="1"/>
+          <p:nvPr/>
+        </p:nvSpPr>
+        <p:spPr>
+          <a:xfrm>
+            <a:off x="685800" y="457200"/>
+            <a:ext cx="7315200" cy="320040"/>
+          </a:xfrm>
+          <a:prstGeom prst="rect">
+            <a:avLst/>
+          </a:prstGeom>
+          <a:noFill/>
+        </p:spPr>
+        <p:txBody>
+          <a:bodyPr wrap="square" anchor="t" lIns="0" rIns="0" tIns="0" bIns="0">
+            <a:spAutoFit/>
+          </a:bodyPr>
+          <a:lstStyle/>
+          <a:p>
+            <a:pPr algn="l">
+              <a:lnSpc>
+                <a:spcPct val="120000"/>
+              </a:lnSpc>
+            </a:pPr>
+            <a:r>
+              <a:rPr sz="1200" b="0" i="0" spc="120">
+                <a:solidFill>
+                  <a:srgbClr val="6FB7D9"/>
+                </a:solidFill>
+                <a:latin typeface="Consolas"/>
+              </a:rPr>
+              <a:t>STEP 3 OF 3</a:t>
+            </a:r>
+          </a:p>
+        </p:txBody>
+      </p:sp>
+      <p:sp>
+        <p:nvSpPr>
+          <p:cNvPr id="3" name="TextBox 2"/>
+          <p:cNvSpPr txBox="1"/>
+          <p:nvPr/>
+        </p:nvSpPr>
+        <p:spPr>
+          <a:xfrm>
+            <a:off x="685800" y="841248"/>
+            <a:ext cx="9601200" cy="1097280"/>
+          </a:xfrm>
+          <a:prstGeom prst="rect">
+            <a:avLst/>
+          </a:prstGeom>
+          <a:noFill/>
+        </p:spPr>
+        <p:txBody>
+          <a:bodyPr wrap="square" anchor="t" lIns="0" rIns="0" tIns="0" bIns="0">
+            <a:spAutoFit/>
+          </a:bodyPr>
+          <a:lstStyle/>
+          <a:p>
+            <a:pPr algn="l">
+              <a:lnSpc>
+                <a:spcPct val="100000"/>
+              </a:lnSpc>
+            </a:pPr>
+            <a:r>
+              <a:rPr sz="3000" b="0" i="0">
+                <a:solidFill>
+                  <a:srgbClr val="F4C563"/>
+                </a:solidFill>
+                <a:latin typeface="Arial Black"/>
+              </a:rPr>
+              <a:t>THE READER'S VIEW</a:t>
+            </a:r>
+          </a:p>
+        </p:txBody>
+      </p:sp>
+      <p:sp>
+        <p:nvSpPr>
+          <p:cNvPr id="4" name="Oval 3"/>
+          <p:cNvSpPr/>
+          <p:nvPr/>
+        </p:nvSpPr>
+        <p:spPr>
+          <a:xfrm>
+            <a:off x="685800" y="2148840"/>
+            <a:ext cx="502920" cy="502920"/>
+          </a:xfrm>
+          <a:prstGeom prst="ellipse">
+            <a:avLst/>
+          </a:prstGeom>
+          <a:solidFill>
+            <a:srgbClr val="E8A93C"/>
+          </a:solidFill>
+          <a:ln>
+            <a:noFill/>
+          </a:ln>
+          <a:effectLst/>
+        </p:spPr>
+        <p:style>
+          <a:lnRef idx="1">
+            <a:schemeClr val="accent1"/>
+          </a:lnRef>
+          <a:fillRef idx="3">
+            <a:schemeClr val="accent1"/>
+          </a:fillRef>
+          <a:effectRef idx="2">
+            <a:schemeClr val="accent1"/>
+          </a:effectRef>
+          <a:fontRef idx="minor">
+            <a:schemeClr val="lt1"/>
+          </a:fontRef>
+        </p:style>
+        <p:txBody>
+          <a:bodyPr rtlCol="0" anchor="ctr"/>
+          <a:lstStyle/>
+          <a:p>
+            <a:pPr algn="ctr"/>
+          </a:p>
+        </p:txBody>
+      </p:sp>
+      <p:sp>
+        <p:nvSpPr>
+          <p:cNvPr id="5" name="TextBox 4"/>
+          <p:cNvSpPr txBox="1"/>
+          <p:nvPr/>
+        </p:nvSpPr>
+        <p:spPr>
+          <a:xfrm>
+            <a:off x="685800" y="2148840"/>
+            <a:ext cx="502920" cy="502920"/>
+          </a:xfrm>
+          <a:prstGeom prst="rect">
+            <a:avLst/>
+          </a:prstGeom>
+          <a:noFill/>
+        </p:spPr>
+        <p:txBody>
+          <a:bodyPr wrap="square" anchor="ctr" lIns="0" rIns="0" tIns="0" bIns="0">
+            <a:spAutoFit/>
+          </a:bodyPr>
+          <a:lstStyle/>
+          <a:p>
+            <a:pPr algn="ctr">
+              <a:lnSpc>
+                <a:spcPct val="120000"/>
+              </a:lnSpc>
+            </a:pPr>
+            <a:r>
+              <a:rPr sz="1800" b="0" i="0">
+                <a:solidFill>
+                  <a:srgbClr val="17140F"/>
+                </a:solidFill>
+                <a:latin typeface="Arial Black"/>
+              </a:rPr>
+              <a:t>3</a:t>
+            </a:r>
+          </a:p>
+        </p:txBody>
+      </p:sp>
+      <p:sp>
+        <p:nvSpPr>
+          <p:cNvPr id="6" name="TextBox 5"/>
+          <p:cNvSpPr txBox="1"/>
+          <p:nvPr/>
+        </p:nvSpPr>
+        <p:spPr>
+          <a:xfrm>
+            <a:off x="685800" y="2834640"/>
+            <a:ext cx="3200400" cy="640080"/>
+          </a:xfrm>
+          <a:prstGeom prst="rect">
+            <a:avLst/>
+          </a:prstGeom>
+          <a:noFill/>
+        </p:spPr>
+        <p:txBody>
+          <a:bodyPr wrap="square" anchor="t" lIns="0" rIns="0" tIns="0" bIns="0">
+            <a:spAutoFit/>
+          </a:bodyPr>
+          <a:lstStyle/>
+          <a:p>
+            <a:pPr algn="l">
+              <a:lnSpc>
+                <a:spcPct val="130000"/>
+              </a:lnSpc>
+            </a:pPr>
+            <a:r>
+              <a:rPr sz="1450" b="0" i="0">
+                <a:solidFill>
+                  <a:srgbClr val="F5EFE2"/>
+                </a:solidFill>
+                <a:latin typeface="Calibri"/>
+              </a:rPr>
+              <a:t>Export, and the reader gets an automatic path through the page.</a:t>
+            </a:r>
+          </a:p>
+        </p:txBody>
+      </p:sp>
+      <p:sp>
+        <p:nvSpPr>
+          <p:cNvPr id="7" name="TextBox 6"/>
+          <p:cNvSpPr txBox="1"/>
+          <p:nvPr/>
+        </p:nvSpPr>
+        <p:spPr>
+          <a:xfrm>
+            <a:off x="850392" y="3566160"/>
+            <a:ext cx="3035808" cy="548640"/>
+          </a:xfrm>
+          <a:prstGeom prst="rect">
+            <a:avLst/>
+          </a:prstGeom>
+          <a:noFill/>
+        </p:spPr>
+        <p:txBody>
+          <a:bodyPr wrap="square" anchor="t" lIns="0" rIns="0" tIns="0" bIns="0">
+            <a:spAutoFit/>
+          </a:bodyPr>
+          <a:lstStyle/>
+          <a:p>
+            <a:pPr algn="l">
+              <a:lnSpc>
+                <a:spcPct val="120000"/>
+              </a:lnSpc>
+            </a:pPr>
+            <a:r>
+              <a:rPr sz="1300" b="0" i="0">
+                <a:solidFill>
+                  <a:srgbClr val="6FB7D9"/>
+                </a:solidFill>
+                <a:latin typeface="Calibri"/>
+              </a:rPr>
+              <a:t>—</a:t>
+            </a:r>
+          </a:p>
+        </p:txBody>
+      </p:sp>
+      <p:sp>
+        <p:nvSpPr>
+          <p:cNvPr id="8" name="TextBox 7"/>
+          <p:cNvSpPr txBox="1"/>
+          <p:nvPr/>
+        </p:nvSpPr>
+        <p:spPr>
+          <a:xfrm>
+            <a:off x="1069848" y="3566160"/>
+            <a:ext cx="2816352" cy="548640"/>
+          </a:xfrm>
+          <a:prstGeom prst="rect">
+            <a:avLst/>
+          </a:prstGeom>
+          <a:noFill/>
+        </p:spPr>
+        <p:txBody>
+          <a:bodyPr wrap="square" anchor="t" lIns="0" rIns="0" tIns="0" bIns="0">
+            <a:spAutoFit/>
+          </a:bodyPr>
+          <a:lstStyle/>
+          <a:p>
+            <a:pPr algn="l">
+              <a:lnSpc>
+                <a:spcPct val="125000"/>
+              </a:lnSpc>
+            </a:pPr>
+            <a:r>
+              <a:rPr sz="1300" b="0" i="0">
+                <a:solidFill>
+                  <a:srgbClr val="A79A85"/>
+                </a:solidFill>
+                <a:latin typeface="Calibri"/>
+              </a:rPr>
+              <a:t>One panel at a time, in the order you set</a:t>
+            </a:r>
+          </a:p>
+        </p:txBody>
+      </p:sp>
+      <p:sp>
+        <p:nvSpPr>
+          <p:cNvPr id="9" name="TextBox 8"/>
+          <p:cNvSpPr txBox="1"/>
+          <p:nvPr/>
+        </p:nvSpPr>
+        <p:spPr>
+          <a:xfrm>
+            <a:off x="850392" y="4133088"/>
+            <a:ext cx="3035808" cy="548640"/>
+          </a:xfrm>
+          <a:prstGeom prst="rect">
+            <a:avLst/>
+          </a:prstGeom>
+          <a:noFill/>
+        </p:spPr>
+        <p:txBody>
+          <a:bodyPr wrap="square" anchor="t" lIns="0" rIns="0" tIns="0" bIns="0">
+            <a:spAutoFit/>
+          </a:bodyPr>
+          <a:lstStyle/>
+          <a:p>
+            <a:pPr algn="l">
+              <a:lnSpc>
+                <a:spcPct val="120000"/>
+              </a:lnSpc>
+            </a:pPr>
+            <a:r>
+              <a:rPr sz="1300" b="0" i="0">
+                <a:solidFill>
+                  <a:srgbClr val="6FB7D9"/>
+                </a:solidFill>
+                <a:latin typeface="Calibri"/>
+              </a:rPr>
+              <a:t>—</a:t>
+            </a:r>
+          </a:p>
+        </p:txBody>
+      </p:sp>
+      <p:sp>
+        <p:nvSpPr>
+          <p:cNvPr id="10" name="TextBox 9"/>
+          <p:cNvSpPr txBox="1"/>
+          <p:nvPr/>
+        </p:nvSpPr>
+        <p:spPr>
+          <a:xfrm>
+            <a:off x="1069848" y="4133088"/>
+            <a:ext cx="2816352" cy="548640"/>
+          </a:xfrm>
+          <a:prstGeom prst="rect">
+            <a:avLst/>
+          </a:prstGeom>
+          <a:noFill/>
+        </p:spPr>
+        <p:txBody>
+          <a:bodyPr wrap="square" anchor="t" lIns="0" rIns="0" tIns="0" bIns="0">
+            <a:spAutoFit/>
+          </a:bodyPr>
+          <a:lstStyle/>
+          <a:p>
+            <a:pPr algn="l">
+              <a:lnSpc>
+                <a:spcPct val="125000"/>
+              </a:lnSpc>
+            </a:pPr>
+            <a:r>
+              <a:rPr sz="1300" b="0" i="0">
+                <a:solidFill>
+                  <a:srgbClr val="A79A85"/>
+                </a:solidFill>
+                <a:latin typeface="Calibri"/>
+              </a:rPr>
+              <a:t>Pan &amp; zoom, fade-to-black, or Cinematic (shown here)</a:t>
+            </a:r>
+          </a:p>
+        </p:txBody>
+      </p:sp>
+      <p:sp>
+        <p:nvSpPr>
+          <p:cNvPr id="11" name="TextBox 10"/>
+          <p:cNvSpPr txBox="1"/>
+          <p:nvPr/>
+        </p:nvSpPr>
+        <p:spPr>
+          <a:xfrm>
+            <a:off x="850392" y="4700016"/>
+            <a:ext cx="3035808" cy="548640"/>
+          </a:xfrm>
+          <a:prstGeom prst="rect">
+            <a:avLst/>
+          </a:prstGeom>
+          <a:noFill/>
+        </p:spPr>
+        <p:txBody>
+          <a:bodyPr wrap="square" anchor="t" lIns="0" rIns="0" tIns="0" bIns="0">
+            <a:spAutoFit/>
+          </a:bodyPr>
+          <a:lstStyle/>
+          <a:p>
+            <a:pPr algn="l">
+              <a:lnSpc>
+                <a:spcPct val="120000"/>
+              </a:lnSpc>
+            </a:pPr>
+            <a:r>
+              <a:rPr sz="1300" b="0" i="0">
+                <a:solidFill>
+                  <a:srgbClr val="6FB7D9"/>
+                </a:solidFill>
+                <a:latin typeface="Calibri"/>
+              </a:rPr>
+              <a:t>—</a:t>
+            </a:r>
+          </a:p>
+        </p:txBody>
+      </p:sp>
+      <p:sp>
+        <p:nvSpPr>
+          <p:cNvPr id="12" name="TextBox 11"/>
+          <p:cNvSpPr txBox="1"/>
+          <p:nvPr/>
+        </p:nvSpPr>
+        <p:spPr>
+          <a:xfrm>
+            <a:off x="1069848" y="4700016"/>
+            <a:ext cx="2816352" cy="548640"/>
+          </a:xfrm>
+          <a:prstGeom prst="rect">
+            <a:avLst/>
+          </a:prstGeom>
+          <a:noFill/>
+        </p:spPr>
+        <p:txBody>
+          <a:bodyPr wrap="square" anchor="t" lIns="0" rIns="0" tIns="0" bIns="0">
+            <a:spAutoFit/>
+          </a:bodyPr>
+          <a:lstStyle/>
+          <a:p>
+            <a:pPr algn="l">
+              <a:lnSpc>
+                <a:spcPct val="125000"/>
+              </a:lnSpc>
+            </a:pPr>
+            <a:r>
+              <a:rPr sz="1300" b="0" i="0">
+                <a:solidFill>
+                  <a:srgbClr val="A79A85"/>
+                </a:solidFill>
+                <a:latin typeface="Calibri"/>
+              </a:rPr>
+              <a:t>Cinematic spotlights the current panel, dims the rest</a:t>
+            </a:r>
+          </a:p>
+        </p:txBody>
+      </p:sp>
+      <p:sp>
+        <p:nvSpPr>
+          <p:cNvPr id="13" name="Rounded Rectangle 12"/>
+          <p:cNvSpPr/>
+          <p:nvPr/>
+        </p:nvSpPr>
+        <p:spPr>
+          <a:xfrm>
+            <a:off x="4434840" y="2148840"/>
+            <a:ext cx="7040880" cy="4160520"/>
+          </a:xfrm>
+          <a:prstGeom prst="roundRect">
+            <a:avLst>
+              <a:gd name="adj" fmla="val 4000"/>
+            </a:avLst>
+          </a:prstGeom>
+          <a:solidFill>
+            <a:srgbClr val="211C15"/>
+          </a:solidFill>
+          <a:ln w="9525">
+            <a:solidFill>
+              <a:srgbClr val="3A3225"/>
+            </a:solidFill>
+          </a:ln>
+          <a:effectLst/>
+        </p:spPr>
+        <p:style>
+          <a:lnRef idx="1">
+            <a:schemeClr val="accent1"/>
+          </a:lnRef>
+          <a:fillRef idx="3">
+            <a:schemeClr val="accent1"/>
+          </a:fillRef>
+          <a:effectRef idx="2">
+            <a:schemeClr val="accent1"/>
+          </a:effectRef>
+          <a:fontRef idx="minor">
+            <a:schemeClr val="lt1"/>
+          </a:fontRef>
+        </p:style>
+        <p:txBody>
+          <a:bodyPr rtlCol="0" anchor="ctr"/>
+          <a:lstStyle/>
+          <a:p>
+            <a:pPr algn="ctr"/>
+          </a:p>
+        </p:txBody>
+      </p:sp>
       <p:pic>
         <p:nvPicPr>
-          <p:cNvPr id="2" name="Picture 1" descr="slide-06.png"/>
+          <p:cNvPr id="14" name="Picture 13" descr="reader-cinematic.jpg"/>
           <p:cNvPicPr>
             <a:picLocks noChangeAspect="1"/>
           </p:cNvPicPr>
@@ -3321,14 +6962,190 @@
         </p:blipFill>
         <p:spPr>
           <a:xfrm>
-            <a:off x="0" y="0"/>
-            <a:ext cx="12191695" cy="6858000"/>
+            <a:off x="4802428" y="2258568"/>
+            <a:ext cx="6305702" cy="3941063"/>
           </a:xfrm>
           <a:prstGeom prst="rect">
             <a:avLst/>
           </a:prstGeom>
         </p:spPr>
       </p:pic>
+      <p:sp>
+        <p:nvSpPr>
+          <p:cNvPr id="15" name="Rectangle 14"/>
+          <p:cNvSpPr/>
+          <p:nvPr/>
+        </p:nvSpPr>
+        <p:spPr>
+          <a:xfrm>
+            <a:off x="4434840" y="6296660"/>
+            <a:ext cx="128015" cy="12700"/>
+          </a:xfrm>
+          <a:prstGeom prst="rect">
+            <a:avLst/>
+          </a:prstGeom>
+          <a:solidFill>
+            <a:srgbClr val="6FB7D9"/>
+          </a:solidFill>
+          <a:ln>
+            <a:noFill/>
+          </a:ln>
+          <a:effectLst/>
+        </p:spPr>
+        <p:style>
+          <a:lnRef idx="1">
+            <a:schemeClr val="accent1"/>
+          </a:lnRef>
+          <a:fillRef idx="3">
+            <a:schemeClr val="accent1"/>
+          </a:fillRef>
+          <a:effectRef idx="2">
+            <a:schemeClr val="accent1"/>
+          </a:effectRef>
+          <a:fontRef idx="minor">
+            <a:schemeClr val="lt1"/>
+          </a:fontRef>
+        </p:style>
+        <p:txBody>
+          <a:bodyPr rtlCol="0" anchor="ctr"/>
+          <a:lstStyle/>
+          <a:p>
+            <a:pPr algn="ctr"/>
+          </a:p>
+        </p:txBody>
+      </p:sp>
+      <p:sp>
+        <p:nvSpPr>
+          <p:cNvPr id="16" name="Rectangle 15"/>
+          <p:cNvSpPr/>
+          <p:nvPr/>
+        </p:nvSpPr>
+        <p:spPr>
+          <a:xfrm>
+            <a:off x="4422139" y="6181344"/>
+            <a:ext cx="12700" cy="128015"/>
+          </a:xfrm>
+          <a:prstGeom prst="rect">
+            <a:avLst/>
+          </a:prstGeom>
+          <a:solidFill>
+            <a:srgbClr val="6FB7D9"/>
+          </a:solidFill>
+          <a:ln>
+            <a:noFill/>
+          </a:ln>
+          <a:effectLst/>
+        </p:spPr>
+        <p:style>
+          <a:lnRef idx="1">
+            <a:schemeClr val="accent1"/>
+          </a:lnRef>
+          <a:fillRef idx="3">
+            <a:schemeClr val="accent1"/>
+          </a:fillRef>
+          <a:effectRef idx="2">
+            <a:schemeClr val="accent1"/>
+          </a:effectRef>
+          <a:fontRef idx="minor">
+            <a:schemeClr val="lt1"/>
+          </a:fontRef>
+        </p:style>
+        <p:txBody>
+          <a:bodyPr rtlCol="0" anchor="ctr"/>
+          <a:lstStyle/>
+          <a:p>
+            <a:pPr algn="ctr"/>
+          </a:p>
+        </p:txBody>
+      </p:sp>
+      <p:sp>
+        <p:nvSpPr>
+          <p:cNvPr id="17" name="Rectangle 16"/>
+          <p:cNvSpPr/>
+          <p:nvPr/>
+        </p:nvSpPr>
+        <p:spPr>
+          <a:xfrm>
+            <a:off x="11347704" y="6296660"/>
+            <a:ext cx="128016" cy="12700"/>
+          </a:xfrm>
+          <a:prstGeom prst="rect">
+            <a:avLst/>
+          </a:prstGeom>
+          <a:solidFill>
+            <a:srgbClr val="6FB7D9"/>
+          </a:solidFill>
+          <a:ln>
+            <a:noFill/>
+          </a:ln>
+          <a:effectLst/>
+        </p:spPr>
+        <p:style>
+          <a:lnRef idx="1">
+            <a:schemeClr val="accent1"/>
+          </a:lnRef>
+          <a:fillRef idx="3">
+            <a:schemeClr val="accent1"/>
+          </a:fillRef>
+          <a:effectRef idx="2">
+            <a:schemeClr val="accent1"/>
+          </a:effectRef>
+          <a:fontRef idx="minor">
+            <a:schemeClr val="lt1"/>
+          </a:fontRef>
+        </p:style>
+        <p:txBody>
+          <a:bodyPr rtlCol="0" anchor="ctr"/>
+          <a:lstStyle/>
+          <a:p>
+            <a:pPr algn="ctr"/>
+          </a:p>
+        </p:txBody>
+      </p:sp>
+      <p:sp>
+        <p:nvSpPr>
+          <p:cNvPr id="18" name="Rectangle 17"/>
+          <p:cNvSpPr/>
+          <p:nvPr/>
+        </p:nvSpPr>
+        <p:spPr>
+          <a:xfrm>
+            <a:off x="11463020" y="6181344"/>
+            <a:ext cx="12700" cy="128015"/>
+          </a:xfrm>
+          <a:prstGeom prst="rect">
+            <a:avLst/>
+          </a:prstGeom>
+          <a:solidFill>
+            <a:srgbClr val="6FB7D9"/>
+          </a:solidFill>
+          <a:ln>
+            <a:noFill/>
+          </a:ln>
+          <a:effectLst/>
+        </p:spPr>
+        <p:style>
+          <a:lnRef idx="1">
+            <a:schemeClr val="accent1"/>
+          </a:lnRef>
+          <a:fillRef idx="3">
+            <a:schemeClr val="accent1"/>
+          </a:fillRef>
+          <a:effectRef idx="2">
+            <a:schemeClr val="accent1"/>
+          </a:effectRef>
+          <a:fontRef idx="minor">
+            <a:schemeClr val="lt1"/>
+          </a:fontRef>
+        </p:style>
+        <p:txBody>
+          <a:bodyPr rtlCol="0" anchor="ctr"/>
+          <a:lstStyle/>
+          <a:p>
+            <a:pPr algn="ctr"/>
+          </a:p>
+        </p:txBody>
+      </p:sp>
     </p:spTree>
   </p:cSld>
   <p:clrMapOvr>
@@ -3340,6 +7157,14 @@
 <file path=ppt/slides/slide7.xml><?xml version="1.0" encoding="utf-8"?>
 <p:sld xmlns:a="http://schemas.openxmlformats.org/drawingml/2006/main" xmlns:p="http://schemas.openxmlformats.org/presentationml/2006/main" xmlns:r="http://schemas.openxmlformats.org/officeDocument/2006/relationships">
   <p:cSld>
+    <p:bg>
+      <p:bgPr>
+        <a:solidFill>
+          <a:srgbClr val="17140F"/>
+        </a:solidFill>
+        <a:effectLst/>
+      </p:bgPr>
+    </p:bg>
     <p:spTree>
       <p:nvGrpSpPr>
         <p:cNvPr id="1" name=""/>
@@ -3347,30 +7172,462 @@
         <p:nvPr/>
       </p:nvGrpSpPr>
       <p:grpSpPr/>
-      <p:pic>
-        <p:nvPicPr>
-          <p:cNvPr id="2" name="Picture 1" descr="slide-07.png"/>
-          <p:cNvPicPr>
-            <a:picLocks noChangeAspect="1"/>
-          </p:cNvPicPr>
-          <p:nvPr/>
-        </p:nvPicPr>
-        <p:blipFill>
-          <a:blip r:embed="rId2"/>
-          <a:stretch>
-            <a:fillRect/>
-          </a:stretch>
-        </p:blipFill>
-        <p:spPr>
-          <a:xfrm>
-            <a:off x="0" y="0"/>
-            <a:ext cx="12191695" cy="6858000"/>
-          </a:xfrm>
-          <a:prstGeom prst="rect">
-            <a:avLst/>
-          </a:prstGeom>
-        </p:spPr>
-      </p:pic>
+      <p:sp>
+        <p:nvSpPr>
+          <p:cNvPr id="2" name="TextBox 1"/>
+          <p:cNvSpPr txBox="1"/>
+          <p:nvPr/>
+        </p:nvSpPr>
+        <p:spPr>
+          <a:xfrm>
+            <a:off x="685800" y="457200"/>
+            <a:ext cx="7315200" cy="320040"/>
+          </a:xfrm>
+          <a:prstGeom prst="rect">
+            <a:avLst/>
+          </a:prstGeom>
+          <a:noFill/>
+        </p:spPr>
+        <p:txBody>
+          <a:bodyPr wrap="square" anchor="t" lIns="0" rIns="0" tIns="0" bIns="0">
+            <a:spAutoFit/>
+          </a:bodyPr>
+          <a:lstStyle/>
+          <a:p>
+            <a:pPr algn="l">
+              <a:lnSpc>
+                <a:spcPct val="120000"/>
+              </a:lnSpc>
+            </a:pPr>
+            <a:r>
+              <a:rPr sz="1200" b="0" i="0" spc="120">
+                <a:solidFill>
+                  <a:srgbClr val="6FB7D9"/>
+                </a:solidFill>
+                <a:latin typeface="Consolas"/>
+              </a:rPr>
+              <a:t>THE FINE PRINT — READ IT ANYWAY</a:t>
+            </a:r>
+          </a:p>
+        </p:txBody>
+      </p:sp>
+      <p:sp>
+        <p:nvSpPr>
+          <p:cNvPr id="3" name="TextBox 2"/>
+          <p:cNvSpPr txBox="1"/>
+          <p:nvPr/>
+        </p:nvSpPr>
+        <p:spPr>
+          <a:xfrm>
+            <a:off x="685800" y="841248"/>
+            <a:ext cx="9601200" cy="1097280"/>
+          </a:xfrm>
+          <a:prstGeom prst="rect">
+            <a:avLst/>
+          </a:prstGeom>
+          <a:noFill/>
+        </p:spPr>
+        <p:txBody>
+          <a:bodyPr wrap="square" anchor="t" lIns="0" rIns="0" tIns="0" bIns="0">
+            <a:spAutoFit/>
+          </a:bodyPr>
+          <a:lstStyle/>
+          <a:p>
+            <a:pPr algn="l">
+              <a:lnSpc>
+                <a:spcPct val="100000"/>
+              </a:lnSpc>
+            </a:pPr>
+            <a:r>
+              <a:rPr sz="3000" b="0" i="0">
+                <a:solidFill>
+                  <a:srgbClr val="F4C563"/>
+                </a:solidFill>
+                <a:latin typeface="Arial Black"/>
+              </a:rPr>
+              <a:t>NOTHING TO LOSE BY TRYING IT</a:t>
+            </a:r>
+          </a:p>
+        </p:txBody>
+      </p:sp>
+      <p:sp>
+        <p:nvSpPr>
+          <p:cNvPr id="4" name="Rounded Rectangle 3"/>
+          <p:cNvSpPr/>
+          <p:nvPr/>
+        </p:nvSpPr>
+        <p:spPr>
+          <a:xfrm>
+            <a:off x="685800" y="2697480"/>
+            <a:ext cx="3383280" cy="2926080"/>
+          </a:xfrm>
+          <a:prstGeom prst="roundRect">
+            <a:avLst>
+              <a:gd name="adj" fmla="val 5000"/>
+            </a:avLst>
+          </a:prstGeom>
+          <a:solidFill>
+            <a:srgbClr val="211C15"/>
+          </a:solidFill>
+          <a:ln w="9525">
+            <a:solidFill>
+              <a:srgbClr val="3A3225"/>
+            </a:solidFill>
+          </a:ln>
+          <a:effectLst/>
+        </p:spPr>
+        <p:style>
+          <a:lnRef idx="1">
+            <a:schemeClr val="accent1"/>
+          </a:lnRef>
+          <a:fillRef idx="3">
+            <a:schemeClr val="accent1"/>
+          </a:fillRef>
+          <a:effectRef idx="2">
+            <a:schemeClr val="accent1"/>
+          </a:effectRef>
+          <a:fontRef idx="minor">
+            <a:schemeClr val="lt1"/>
+          </a:fontRef>
+        </p:style>
+        <p:txBody>
+          <a:bodyPr rtlCol="0" anchor="ctr"/>
+          <a:lstStyle/>
+          <a:p>
+            <a:pPr algn="ctr"/>
+          </a:p>
+        </p:txBody>
+      </p:sp>
+      <p:sp>
+        <p:nvSpPr>
+          <p:cNvPr id="5" name="TextBox 4"/>
+          <p:cNvSpPr txBox="1"/>
+          <p:nvPr/>
+        </p:nvSpPr>
+        <p:spPr>
+          <a:xfrm>
+            <a:off x="941832" y="2990088"/>
+            <a:ext cx="2871216" cy="640080"/>
+          </a:xfrm>
+          <a:prstGeom prst="rect">
+            <a:avLst/>
+          </a:prstGeom>
+          <a:noFill/>
+        </p:spPr>
+        <p:txBody>
+          <a:bodyPr wrap="square" anchor="t" lIns="0" rIns="0" tIns="0" bIns="0">
+            <a:spAutoFit/>
+          </a:bodyPr>
+          <a:lstStyle/>
+          <a:p>
+            <a:pPr algn="l">
+              <a:lnSpc>
+                <a:spcPct val="120000"/>
+              </a:lnSpc>
+            </a:pPr>
+            <a:r>
+              <a:rPr sz="2400" b="0" i="0">
+                <a:solidFill>
+                  <a:srgbClr val="F4C563"/>
+                </a:solidFill>
+                <a:latin typeface="Arial Black"/>
+              </a:rPr>
+              <a:t>0 UPLOADS</a:t>
+            </a:r>
+          </a:p>
+        </p:txBody>
+      </p:sp>
+      <p:sp>
+        <p:nvSpPr>
+          <p:cNvPr id="6" name="TextBox 5"/>
+          <p:cNvSpPr txBox="1"/>
+          <p:nvPr/>
+        </p:nvSpPr>
+        <p:spPr>
+          <a:xfrm>
+            <a:off x="941832" y="3657600"/>
+            <a:ext cx="2871216" cy="1737360"/>
+          </a:xfrm>
+          <a:prstGeom prst="rect">
+            <a:avLst/>
+          </a:prstGeom>
+          <a:noFill/>
+        </p:spPr>
+        <p:txBody>
+          <a:bodyPr wrap="square" anchor="t" lIns="0" rIns="0" tIns="0" bIns="0">
+            <a:spAutoFit/>
+          </a:bodyPr>
+          <a:lstStyle/>
+          <a:p>
+            <a:pPr algn="l">
+              <a:lnSpc>
+                <a:spcPct val="135000"/>
+              </a:lnSpc>
+            </a:pPr>
+            <a:r>
+              <a:rPr sz="1350" b="0" i="0">
+                <a:solidFill>
+                  <a:srgbClr val="A79A85"/>
+                </a:solidFill>
+                <a:latin typeface="Calibri"/>
+              </a:rPr>
+              <a:t>Every archive stays on your own machine, start to finish — the editor never phones home.</a:t>
+            </a:r>
+          </a:p>
+        </p:txBody>
+      </p:sp>
+      <p:sp>
+        <p:nvSpPr>
+          <p:cNvPr id="7" name="Rounded Rectangle 6"/>
+          <p:cNvSpPr/>
+          <p:nvPr/>
+        </p:nvSpPr>
+        <p:spPr>
+          <a:xfrm>
+            <a:off x="4325112" y="2697480"/>
+            <a:ext cx="3383280" cy="2926080"/>
+          </a:xfrm>
+          <a:prstGeom prst="roundRect">
+            <a:avLst>
+              <a:gd name="adj" fmla="val 5000"/>
+            </a:avLst>
+          </a:prstGeom>
+          <a:solidFill>
+            <a:srgbClr val="211C15"/>
+          </a:solidFill>
+          <a:ln w="9525">
+            <a:solidFill>
+              <a:srgbClr val="3A3225"/>
+            </a:solidFill>
+          </a:ln>
+          <a:effectLst/>
+        </p:spPr>
+        <p:style>
+          <a:lnRef idx="1">
+            <a:schemeClr val="accent1"/>
+          </a:lnRef>
+          <a:fillRef idx="3">
+            <a:schemeClr val="accent1"/>
+          </a:fillRef>
+          <a:effectRef idx="2">
+            <a:schemeClr val="accent1"/>
+          </a:effectRef>
+          <a:fontRef idx="minor">
+            <a:schemeClr val="lt1"/>
+          </a:fontRef>
+        </p:style>
+        <p:txBody>
+          <a:bodyPr rtlCol="0" anchor="ctr"/>
+          <a:lstStyle/>
+          <a:p>
+            <a:pPr algn="ctr"/>
+          </a:p>
+        </p:txBody>
+      </p:sp>
+      <p:sp>
+        <p:nvSpPr>
+          <p:cNvPr id="8" name="TextBox 7"/>
+          <p:cNvSpPr txBox="1"/>
+          <p:nvPr/>
+        </p:nvSpPr>
+        <p:spPr>
+          <a:xfrm>
+            <a:off x="4581144" y="2990088"/>
+            <a:ext cx="2871216" cy="640080"/>
+          </a:xfrm>
+          <a:prstGeom prst="rect">
+            <a:avLst/>
+          </a:prstGeom>
+          <a:noFill/>
+        </p:spPr>
+        <p:txBody>
+          <a:bodyPr wrap="square" anchor="t" lIns="0" rIns="0" tIns="0" bIns="0">
+            <a:spAutoFit/>
+          </a:bodyPr>
+          <a:lstStyle/>
+          <a:p>
+            <a:pPr algn="l">
+              <a:lnSpc>
+                <a:spcPct val="120000"/>
+              </a:lnSpc>
+            </a:pPr>
+            <a:r>
+              <a:rPr sz="2400" b="0" i="0">
+                <a:solidFill>
+                  <a:srgbClr val="F4C563"/>
+                </a:solidFill>
+                <a:latin typeface="Arial Black"/>
+              </a:rPr>
+              <a:t>OPEN FORMAT</a:t>
+            </a:r>
+          </a:p>
+        </p:txBody>
+      </p:sp>
+      <p:sp>
+        <p:nvSpPr>
+          <p:cNvPr id="9" name="TextBox 8"/>
+          <p:cNvSpPr txBox="1"/>
+          <p:nvPr/>
+        </p:nvSpPr>
+        <p:spPr>
+          <a:xfrm>
+            <a:off x="4581144" y="3657600"/>
+            <a:ext cx="2871216" cy="1737360"/>
+          </a:xfrm>
+          <a:prstGeom prst="rect">
+            <a:avLst/>
+          </a:prstGeom>
+          <a:noFill/>
+        </p:spPr>
+        <p:txBody>
+          <a:bodyPr wrap="square" anchor="t" lIns="0" rIns="0" tIns="0" bIns="0">
+            <a:spAutoFit/>
+          </a:bodyPr>
+          <a:lstStyle/>
+          <a:p>
+            <a:pPr algn="l">
+              <a:lnSpc>
+                <a:spcPct val="135000"/>
+              </a:lnSpc>
+            </a:pPr>
+            <a:r>
+              <a:rPr sz="1350" b="0" i="0">
+                <a:solidFill>
+                  <a:srgbClr val="A79A85"/>
+                </a:solidFill>
+                <a:latin typeface="Calibri"/>
+              </a:rPr>
+              <a:t>ACBF is a public spec, not something locked to this reader or this company.</a:t>
+            </a:r>
+          </a:p>
+        </p:txBody>
+      </p:sp>
+      <p:sp>
+        <p:nvSpPr>
+          <p:cNvPr id="10" name="Rounded Rectangle 9"/>
+          <p:cNvSpPr/>
+          <p:nvPr/>
+        </p:nvSpPr>
+        <p:spPr>
+          <a:xfrm>
+            <a:off x="7964424" y="2697480"/>
+            <a:ext cx="3383280" cy="2926080"/>
+          </a:xfrm>
+          <a:prstGeom prst="roundRect">
+            <a:avLst>
+              <a:gd name="adj" fmla="val 5000"/>
+            </a:avLst>
+          </a:prstGeom>
+          <a:solidFill>
+            <a:srgbClr val="211C15"/>
+          </a:solidFill>
+          <a:ln w="9525">
+            <a:solidFill>
+              <a:srgbClr val="3A3225"/>
+            </a:solidFill>
+          </a:ln>
+          <a:effectLst/>
+        </p:spPr>
+        <p:style>
+          <a:lnRef idx="1">
+            <a:schemeClr val="accent1"/>
+          </a:lnRef>
+          <a:fillRef idx="3">
+            <a:schemeClr val="accent1"/>
+          </a:fillRef>
+          <a:effectRef idx="2">
+            <a:schemeClr val="accent1"/>
+          </a:effectRef>
+          <a:fontRef idx="minor">
+            <a:schemeClr val="lt1"/>
+          </a:fontRef>
+        </p:style>
+        <p:txBody>
+          <a:bodyPr rtlCol="0" anchor="ctr"/>
+          <a:lstStyle/>
+          <a:p>
+            <a:pPr algn="ctr"/>
+          </a:p>
+        </p:txBody>
+      </p:sp>
+      <p:sp>
+        <p:nvSpPr>
+          <p:cNvPr id="11" name="TextBox 10"/>
+          <p:cNvSpPr txBox="1"/>
+          <p:nvPr/>
+        </p:nvSpPr>
+        <p:spPr>
+          <a:xfrm>
+            <a:off x="8220456" y="2990088"/>
+            <a:ext cx="2871216" cy="640080"/>
+          </a:xfrm>
+          <a:prstGeom prst="rect">
+            <a:avLst/>
+          </a:prstGeom>
+          <a:noFill/>
+        </p:spPr>
+        <p:txBody>
+          <a:bodyPr wrap="square" anchor="t" lIns="0" rIns="0" tIns="0" bIns="0">
+            <a:spAutoFit/>
+          </a:bodyPr>
+          <a:lstStyle/>
+          <a:p>
+            <a:pPr algn="l">
+              <a:lnSpc>
+                <a:spcPct val="120000"/>
+              </a:lnSpc>
+            </a:pPr>
+            <a:r>
+              <a:rPr sz="2400" b="0" i="0">
+                <a:solidFill>
+                  <a:srgbClr val="F4C563"/>
+                </a:solidFill>
+                <a:latin typeface="Arial Black"/>
+              </a:rPr>
+              <a:t>1 ISSUE</a:t>
+            </a:r>
+          </a:p>
+        </p:txBody>
+      </p:sp>
+      <p:sp>
+        <p:nvSpPr>
+          <p:cNvPr id="12" name="TextBox 11"/>
+          <p:cNvSpPr txBox="1"/>
+          <p:nvPr/>
+        </p:nvSpPr>
+        <p:spPr>
+          <a:xfrm>
+            <a:off x="8220456" y="3657600"/>
+            <a:ext cx="2871216" cy="1737360"/>
+          </a:xfrm>
+          <a:prstGeom prst="rect">
+            <a:avLst/>
+          </a:prstGeom>
+          <a:noFill/>
+        </p:spPr>
+        <p:txBody>
+          <a:bodyPr wrap="square" anchor="t" lIns="0" rIns="0" tIns="0" bIns="0">
+            <a:spAutoFit/>
+          </a:bodyPr>
+          <a:lstStyle/>
+          <a:p>
+            <a:pPr algn="l">
+              <a:lnSpc>
+                <a:spcPct val="135000"/>
+              </a:lnSpc>
+            </a:pPr>
+            <a:r>
+              <a:rPr sz="1350" b="0" i="0">
+                <a:solidFill>
+                  <a:srgbClr val="A79A85"/>
+                </a:solidFill>
+                <a:latin typeface="Calibri"/>
+              </a:rPr>
+              <a:t>is enough to try it end to end — no migration, no contract, no commitment.</a:t>
+            </a:r>
+          </a:p>
+        </p:txBody>
+      </p:sp>
     </p:spTree>
   </p:cSld>
   <p:clrMapOvr>
@@ -3382,6 +7639,14 @@
 <file path=ppt/slides/slide8.xml><?xml version="1.0" encoding="utf-8"?>
 <p:sld xmlns:a="http://schemas.openxmlformats.org/drawingml/2006/main" xmlns:p="http://schemas.openxmlformats.org/presentationml/2006/main" xmlns:r="http://schemas.openxmlformats.org/officeDocument/2006/relationships">
   <p:cSld>
+    <p:bg>
+      <p:bgPr>
+        <a:solidFill>
+          <a:srgbClr val="17140F"/>
+        </a:solidFill>
+        <a:effectLst/>
+      </p:bgPr>
+    </p:bg>
     <p:spTree>
       <p:nvGrpSpPr>
         <p:cNvPr id="1" name=""/>
@@ -3389,30 +7654,494 @@
         <p:nvPr/>
       </p:nvGrpSpPr>
       <p:grpSpPr/>
-      <p:pic>
-        <p:nvPicPr>
-          <p:cNvPr id="2" name="Picture 1" descr="slide-08.png"/>
-          <p:cNvPicPr>
-            <a:picLocks noChangeAspect="1"/>
-          </p:cNvPicPr>
-          <p:nvPr/>
-        </p:nvPicPr>
-        <p:blipFill>
-          <a:blip r:embed="rId2"/>
-          <a:stretch>
-            <a:fillRect/>
-          </a:stretch>
-        </p:blipFill>
-        <p:spPr>
-          <a:xfrm>
-            <a:off x="0" y="0"/>
-            <a:ext cx="12191695" cy="6858000"/>
-          </a:xfrm>
-          <a:prstGeom prst="rect">
-            <a:avLst/>
-          </a:prstGeom>
-        </p:spPr>
-      </p:pic>
+      <p:sp>
+        <p:nvSpPr>
+          <p:cNvPr id="2" name="TextBox 1"/>
+          <p:cNvSpPr txBox="1"/>
+          <p:nvPr/>
+        </p:nvSpPr>
+        <p:spPr>
+          <a:xfrm>
+            <a:off x="685800" y="457200"/>
+            <a:ext cx="7315200" cy="320040"/>
+          </a:xfrm>
+          <a:prstGeom prst="rect">
+            <a:avLst/>
+          </a:prstGeom>
+          <a:noFill/>
+        </p:spPr>
+        <p:txBody>
+          <a:bodyPr wrap="square" anchor="t" lIns="0" rIns="0" tIns="0" bIns="0">
+            <a:spAutoFit/>
+          </a:bodyPr>
+          <a:lstStyle/>
+          <a:p>
+            <a:pPr algn="l">
+              <a:lnSpc>
+                <a:spcPct val="120000"/>
+              </a:lnSpc>
+            </a:pPr>
+            <a:r>
+              <a:rPr sz="1200" b="0" i="0" spc="120">
+                <a:solidFill>
+                  <a:srgbClr val="6FB7D9"/>
+                </a:solidFill>
+                <a:latin typeface="Consolas"/>
+              </a:rPr>
+              <a:t>FOR YOUR ARCHIVE, SPECIFICALLY</a:t>
+            </a:r>
+          </a:p>
+        </p:txBody>
+      </p:sp>
+      <p:sp>
+        <p:nvSpPr>
+          <p:cNvPr id="3" name="TextBox 2"/>
+          <p:cNvSpPr txBox="1"/>
+          <p:nvPr/>
+        </p:nvSpPr>
+        <p:spPr>
+          <a:xfrm>
+            <a:off x="685800" y="841248"/>
+            <a:ext cx="9601200" cy="1097280"/>
+          </a:xfrm>
+          <a:prstGeom prst="rect">
+            <a:avLst/>
+          </a:prstGeom>
+          <a:noFill/>
+        </p:spPr>
+        <p:txBody>
+          <a:bodyPr wrap="square" anchor="t" lIns="0" rIns="0" tIns="0" bIns="0">
+            <a:spAutoFit/>
+          </a:bodyPr>
+          <a:lstStyle/>
+          <a:p>
+            <a:pPr algn="l">
+              <a:lnSpc>
+                <a:spcPct val="100000"/>
+              </a:lnSpc>
+            </a:pPr>
+            <a:r>
+              <a:rPr sz="3000" b="0" i="0">
+                <a:solidFill>
+                  <a:srgbClr val="F4C563"/>
+                </a:solidFill>
+                <a:latin typeface="Arial Black"/>
+              </a:rPr>
+              <a:t>WHAT CHANGES ON YOUR END</a:t>
+            </a:r>
+          </a:p>
+        </p:txBody>
+      </p:sp>
+      <p:sp>
+        <p:nvSpPr>
+          <p:cNvPr id="4" name="Rectangle 3"/>
+          <p:cNvSpPr/>
+          <p:nvPr/>
+        </p:nvSpPr>
+        <p:spPr>
+          <a:xfrm>
+            <a:off x="685800" y="2331720"/>
+            <a:ext cx="10817352" cy="10972"/>
+          </a:xfrm>
+          <a:prstGeom prst="rect">
+            <a:avLst/>
+          </a:prstGeom>
+          <a:solidFill>
+            <a:srgbClr val="3A3225"/>
+          </a:solidFill>
+          <a:ln>
+            <a:noFill/>
+          </a:ln>
+          <a:effectLst/>
+        </p:spPr>
+        <p:style>
+          <a:lnRef idx="1">
+            <a:schemeClr val="accent1"/>
+          </a:lnRef>
+          <a:fillRef idx="3">
+            <a:schemeClr val="accent1"/>
+          </a:fillRef>
+          <a:effectRef idx="2">
+            <a:schemeClr val="accent1"/>
+          </a:effectRef>
+          <a:fontRef idx="minor">
+            <a:schemeClr val="lt1"/>
+          </a:fontRef>
+        </p:style>
+        <p:txBody>
+          <a:bodyPr rtlCol="0" anchor="ctr"/>
+          <a:lstStyle/>
+          <a:p>
+            <a:pPr algn="ctr"/>
+          </a:p>
+        </p:txBody>
+      </p:sp>
+      <p:sp>
+        <p:nvSpPr>
+          <p:cNvPr id="5" name="TextBox 4"/>
+          <p:cNvSpPr txBox="1"/>
+          <p:nvPr/>
+        </p:nvSpPr>
+        <p:spPr>
+          <a:xfrm>
+            <a:off x="685800" y="2587752"/>
+            <a:ext cx="1920240" cy="548640"/>
+          </a:xfrm>
+          <a:prstGeom prst="rect">
+            <a:avLst/>
+          </a:prstGeom>
+          <a:noFill/>
+        </p:spPr>
+        <p:txBody>
+          <a:bodyPr wrap="square" anchor="t" lIns="0" rIns="0" tIns="0" bIns="0">
+            <a:spAutoFit/>
+          </a:bodyPr>
+          <a:lstStyle/>
+          <a:p>
+            <a:pPr algn="l">
+              <a:lnSpc>
+                <a:spcPct val="120000"/>
+              </a:lnSpc>
+            </a:pPr>
+            <a:r>
+              <a:rPr sz="1200" b="0" i="0" spc="80">
+                <a:solidFill>
+                  <a:srgbClr val="6FB7D9"/>
+                </a:solidFill>
+                <a:latin typeface="Consolas"/>
+              </a:rPr>
+              <a:t>YOUR ARCHIVE</a:t>
+            </a:r>
+          </a:p>
+        </p:txBody>
+      </p:sp>
+      <p:sp>
+        <p:nvSpPr>
+          <p:cNvPr id="6" name="TextBox 5"/>
+          <p:cNvSpPr txBox="1"/>
+          <p:nvPr/>
+        </p:nvSpPr>
+        <p:spPr>
+          <a:xfrm>
+            <a:off x="2880360" y="2551176"/>
+            <a:ext cx="8622792" cy="731520"/>
+          </a:xfrm>
+          <a:prstGeom prst="rect">
+            <a:avLst/>
+          </a:prstGeom>
+          <a:noFill/>
+        </p:spPr>
+        <p:txBody>
+          <a:bodyPr wrap="square" anchor="t" lIns="0" rIns="0" tIns="0" bIns="0">
+            <a:spAutoFit/>
+          </a:bodyPr>
+          <a:lstStyle/>
+          <a:p>
+            <a:pPr algn="l">
+              <a:lnSpc>
+                <a:spcPct val="130000"/>
+              </a:lnSpc>
+            </a:pPr>
+            <a:r>
+              <a:rPr sz="1600" b="0" i="0">
+                <a:solidFill>
+                  <a:srgbClr val="F5EFE2"/>
+                </a:solidFill>
+                <a:latin typeface="Calibri"/>
+              </a:rPr>
+              <a:t>Works as-is — no re-scanning, no re-lettering, no format change.</a:t>
+            </a:r>
+          </a:p>
+        </p:txBody>
+      </p:sp>
+      <p:sp>
+        <p:nvSpPr>
+          <p:cNvPr id="7" name="Rectangle 6"/>
+          <p:cNvSpPr/>
+          <p:nvPr/>
+        </p:nvSpPr>
+        <p:spPr>
+          <a:xfrm>
+            <a:off x="685800" y="3374136"/>
+            <a:ext cx="10817352" cy="10972"/>
+          </a:xfrm>
+          <a:prstGeom prst="rect">
+            <a:avLst/>
+          </a:prstGeom>
+          <a:solidFill>
+            <a:srgbClr val="3A3225"/>
+          </a:solidFill>
+          <a:ln>
+            <a:noFill/>
+          </a:ln>
+          <a:effectLst/>
+        </p:spPr>
+        <p:style>
+          <a:lnRef idx="1">
+            <a:schemeClr val="accent1"/>
+          </a:lnRef>
+          <a:fillRef idx="3">
+            <a:schemeClr val="accent1"/>
+          </a:fillRef>
+          <a:effectRef idx="2">
+            <a:schemeClr val="accent1"/>
+          </a:effectRef>
+          <a:fontRef idx="minor">
+            <a:schemeClr val="lt1"/>
+          </a:fontRef>
+        </p:style>
+        <p:txBody>
+          <a:bodyPr rtlCol="0" anchor="ctr"/>
+          <a:lstStyle/>
+          <a:p>
+            <a:pPr algn="ctr"/>
+          </a:p>
+        </p:txBody>
+      </p:sp>
+      <p:sp>
+        <p:nvSpPr>
+          <p:cNvPr id="8" name="TextBox 7"/>
+          <p:cNvSpPr txBox="1"/>
+          <p:nvPr/>
+        </p:nvSpPr>
+        <p:spPr>
+          <a:xfrm>
+            <a:off x="685800" y="3758184"/>
+            <a:ext cx="1920240" cy="548640"/>
+          </a:xfrm>
+          <a:prstGeom prst="rect">
+            <a:avLst/>
+          </a:prstGeom>
+          <a:noFill/>
+        </p:spPr>
+        <p:txBody>
+          <a:bodyPr wrap="square" anchor="t" lIns="0" rIns="0" tIns="0" bIns="0">
+            <a:spAutoFit/>
+          </a:bodyPr>
+          <a:lstStyle/>
+          <a:p>
+            <a:pPr algn="l">
+              <a:lnSpc>
+                <a:spcPct val="120000"/>
+              </a:lnSpc>
+            </a:pPr>
+            <a:r>
+              <a:rPr sz="1200" b="0" i="0" spc="80">
+                <a:solidFill>
+                  <a:srgbClr val="6FB7D9"/>
+                </a:solidFill>
+                <a:latin typeface="Consolas"/>
+              </a:rPr>
+              <a:t>YOUR READERS</a:t>
+            </a:r>
+          </a:p>
+        </p:txBody>
+      </p:sp>
+      <p:sp>
+        <p:nvSpPr>
+          <p:cNvPr id="9" name="TextBox 8"/>
+          <p:cNvSpPr txBox="1"/>
+          <p:nvPr/>
+        </p:nvSpPr>
+        <p:spPr>
+          <a:xfrm>
+            <a:off x="2880360" y="3721608"/>
+            <a:ext cx="8622792" cy="731520"/>
+          </a:xfrm>
+          <a:prstGeom prst="rect">
+            <a:avLst/>
+          </a:prstGeom>
+          <a:noFill/>
+        </p:spPr>
+        <p:txBody>
+          <a:bodyPr wrap="square" anchor="t" lIns="0" rIns="0" tIns="0" bIns="0">
+            <a:spAutoFit/>
+          </a:bodyPr>
+          <a:lstStyle/>
+          <a:p>
+            <a:pPr algn="l">
+              <a:lnSpc>
+                <a:spcPct val="130000"/>
+              </a:lnSpc>
+            </a:pPr>
+            <a:r>
+              <a:rPr sz="1600" b="0" i="0">
+                <a:solidFill>
+                  <a:srgbClr val="F5EFE2"/>
+                </a:solidFill>
+                <a:latin typeface="Calibri"/>
+              </a:rPr>
+              <a:t>A phone-native way to read a page that was drawn for print.</a:t>
+            </a:r>
+          </a:p>
+        </p:txBody>
+      </p:sp>
+      <p:sp>
+        <p:nvSpPr>
+          <p:cNvPr id="10" name="Rectangle 9"/>
+          <p:cNvSpPr/>
+          <p:nvPr/>
+        </p:nvSpPr>
+        <p:spPr>
+          <a:xfrm>
+            <a:off x="685800" y="4544568"/>
+            <a:ext cx="10817352" cy="10972"/>
+          </a:xfrm>
+          <a:prstGeom prst="rect">
+            <a:avLst/>
+          </a:prstGeom>
+          <a:solidFill>
+            <a:srgbClr val="3A3225"/>
+          </a:solidFill>
+          <a:ln>
+            <a:noFill/>
+          </a:ln>
+          <a:effectLst/>
+        </p:spPr>
+        <p:style>
+          <a:lnRef idx="1">
+            <a:schemeClr val="accent1"/>
+          </a:lnRef>
+          <a:fillRef idx="3">
+            <a:schemeClr val="accent1"/>
+          </a:fillRef>
+          <a:effectRef idx="2">
+            <a:schemeClr val="accent1"/>
+          </a:effectRef>
+          <a:fontRef idx="minor">
+            <a:schemeClr val="lt1"/>
+          </a:fontRef>
+        </p:style>
+        <p:txBody>
+          <a:bodyPr rtlCol="0" anchor="ctr"/>
+          <a:lstStyle/>
+          <a:p>
+            <a:pPr algn="ctr"/>
+          </a:p>
+        </p:txBody>
+      </p:sp>
+      <p:sp>
+        <p:nvSpPr>
+          <p:cNvPr id="11" name="TextBox 10"/>
+          <p:cNvSpPr txBox="1"/>
+          <p:nvPr/>
+        </p:nvSpPr>
+        <p:spPr>
+          <a:xfrm>
+            <a:off x="685800" y="4928616"/>
+            <a:ext cx="1920240" cy="548640"/>
+          </a:xfrm>
+          <a:prstGeom prst="rect">
+            <a:avLst/>
+          </a:prstGeom>
+          <a:noFill/>
+        </p:spPr>
+        <p:txBody>
+          <a:bodyPr wrap="square" anchor="t" lIns="0" rIns="0" tIns="0" bIns="0">
+            <a:spAutoFit/>
+          </a:bodyPr>
+          <a:lstStyle/>
+          <a:p>
+            <a:pPr algn="l">
+              <a:lnSpc>
+                <a:spcPct val="120000"/>
+              </a:lnSpc>
+            </a:pPr>
+            <a:r>
+              <a:rPr sz="1200" b="0" i="0" spc="80">
+                <a:solidFill>
+                  <a:srgbClr val="6FB7D9"/>
+                </a:solidFill>
+                <a:latin typeface="Consolas"/>
+              </a:rPr>
+              <a:t>YOUR DATA</a:t>
+            </a:r>
+          </a:p>
+        </p:txBody>
+      </p:sp>
+      <p:sp>
+        <p:nvSpPr>
+          <p:cNvPr id="12" name="TextBox 11"/>
+          <p:cNvSpPr txBox="1"/>
+          <p:nvPr/>
+        </p:nvSpPr>
+        <p:spPr>
+          <a:xfrm>
+            <a:off x="2880360" y="4892040"/>
+            <a:ext cx="8622792" cy="731520"/>
+          </a:xfrm>
+          <a:prstGeom prst="rect">
+            <a:avLst/>
+          </a:prstGeom>
+          <a:noFill/>
+        </p:spPr>
+        <p:txBody>
+          <a:bodyPr wrap="square" anchor="t" lIns="0" rIns="0" tIns="0" bIns="0">
+            <a:spAutoFit/>
+          </a:bodyPr>
+          <a:lstStyle/>
+          <a:p>
+            <a:pPr algn="l">
+              <a:lnSpc>
+                <a:spcPct val="130000"/>
+              </a:lnSpc>
+            </a:pPr>
+            <a:r>
+              <a:rPr sz="1600" b="0" i="0">
+                <a:solidFill>
+                  <a:srgbClr val="F5EFE2"/>
+                </a:solidFill>
+                <a:latin typeface="Calibri"/>
+              </a:rPr>
+              <a:t>The panel map is a file you keep — export it, edit it later, or walk away with it.</a:t>
+            </a:r>
+          </a:p>
+        </p:txBody>
+      </p:sp>
+      <p:sp>
+        <p:nvSpPr>
+          <p:cNvPr id="13" name="Rectangle 12"/>
+          <p:cNvSpPr/>
+          <p:nvPr/>
+        </p:nvSpPr>
+        <p:spPr>
+          <a:xfrm>
+            <a:off x="685800" y="5715000"/>
+            <a:ext cx="10817352" cy="10972"/>
+          </a:xfrm>
+          <a:prstGeom prst="rect">
+            <a:avLst/>
+          </a:prstGeom>
+          <a:solidFill>
+            <a:srgbClr val="3A3225"/>
+          </a:solidFill>
+          <a:ln>
+            <a:noFill/>
+          </a:ln>
+          <a:effectLst/>
+        </p:spPr>
+        <p:style>
+          <a:lnRef idx="1">
+            <a:schemeClr val="accent1"/>
+          </a:lnRef>
+          <a:fillRef idx="3">
+            <a:schemeClr val="accent1"/>
+          </a:fillRef>
+          <a:effectRef idx="2">
+            <a:schemeClr val="accent1"/>
+          </a:effectRef>
+          <a:fontRef idx="minor">
+            <a:schemeClr val="lt1"/>
+          </a:fontRef>
+        </p:style>
+        <p:txBody>
+          <a:bodyPr rtlCol="0" anchor="ctr"/>
+          <a:lstStyle/>
+          <a:p>
+            <a:pPr algn="ctr"/>
+          </a:p>
+        </p:txBody>
+      </p:sp>
     </p:spTree>
   </p:cSld>
   <p:clrMapOvr>

--- a/demo/ACBF_Panel_Editor_Demo.pptx
+++ b/demo/ACBF_Panel_Editor_Demo.pptx
@@ -3295,7 +3295,7 @@
         <p:spPr>
           <a:xfrm>
             <a:off x="685800" y="960120"/>
-            <a:ext cx="6400800" cy="1737360"/>
+            <a:ext cx="6400800" cy="914400"/>
           </a:xfrm>
           <a:prstGeom prst="rect">
             <a:avLst/>
@@ -3314,36 +3314,59 @@
               </a:lnSpc>
             </a:pPr>
             <a:r>
-              <a:rPr sz="4600" b="0" i="0">
+              <a:rPr sz="5400" b="0" i="0">
                 <a:solidFill>
                   <a:srgbClr val="F4C563"/>
                 </a:solidFill>
                 <a:latin typeface="Arial Black"/>
               </a:rPr>
-              <a:t>ACBF</a:t>
-            </a:r>
-          </a:p>
+              <a:t>Comicaa</a:t>
+            </a:r>
+          </a:p>
+        </p:txBody>
+      </p:sp>
+      <p:sp>
+        <p:nvSpPr>
+          <p:cNvPr id="7" name="TextBox 6"/>
+          <p:cNvSpPr txBox="1"/>
+          <p:nvPr/>
+        </p:nvSpPr>
+        <p:spPr>
+          <a:xfrm>
+            <a:off x="685800" y="1874519"/>
+            <a:ext cx="6400800" cy="457200"/>
+          </a:xfrm>
+          <a:prstGeom prst="rect">
+            <a:avLst/>
+          </a:prstGeom>
+          <a:noFill/>
+        </p:spPr>
+        <p:txBody>
+          <a:bodyPr wrap="square" anchor="t" lIns="0" rIns="0" tIns="0" bIns="0">
+            <a:spAutoFit/>
+          </a:bodyPr>
+          <a:lstStyle/>
           <a:p>
             <a:pPr algn="l">
               <a:lnSpc>
-                <a:spcPct val="100000"/>
+                <a:spcPct val="120000"/>
               </a:lnSpc>
             </a:pPr>
             <a:r>
-              <a:rPr sz="4600" b="0" i="0">
-                <a:solidFill>
-                  <a:srgbClr val="F4C563"/>
-                </a:solidFill>
-                <a:latin typeface="Arial Black"/>
+              <a:rPr sz="1800" b="0" i="0" spc="140">
+                <a:solidFill>
+                  <a:srgbClr val="6FB7D9"/>
+                </a:solidFill>
+                <a:latin typeface="Consolas"/>
               </a:rPr>
-              <a:t>PANEL EDITOR</a:t>
-            </a:r>
-          </a:p>
-        </p:txBody>
-      </p:sp>
-      <p:sp>
-        <p:nvSpPr>
-          <p:cNvPr id="7" name="TextBox 6"/>
+              <a:t>ACBF PANEL EDITOR</a:t>
+            </a:r>
+          </a:p>
+        </p:txBody>
+      </p:sp>
+      <p:sp>
+        <p:nvSpPr>
+          <p:cNvPr id="8" name="TextBox 7"/>
           <p:cNvSpPr txBox="1"/>
           <p:nvPr/>
         </p:nvSpPr>
@@ -3382,7 +3405,7 @@
       </p:sp>
       <p:sp>
         <p:nvSpPr>
-          <p:cNvPr id="8" name="Rounded Rectangle 7"/>
+          <p:cNvPr id="9" name="Rounded Rectangle 8"/>
           <p:cNvSpPr/>
           <p:nvPr/>
         </p:nvSpPr>
@@ -3428,7 +3451,7 @@
       </p:sp>
       <p:sp>
         <p:nvSpPr>
-          <p:cNvPr id="9" name="TextBox 8"/>
+          <p:cNvPr id="10" name="TextBox 9"/>
           <p:cNvSpPr txBox="1"/>
           <p:nvPr/>
         </p:nvSpPr>
@@ -3467,7 +3490,7 @@
       </p:sp>
       <p:sp>
         <p:nvSpPr>
-          <p:cNvPr id="10" name="TextBox 9"/>
+          <p:cNvPr id="11" name="TextBox 10"/>
           <p:cNvSpPr txBox="1"/>
           <p:nvPr/>
         </p:nvSpPr>
@@ -3506,7 +3529,7 @@
       </p:sp>
       <p:sp>
         <p:nvSpPr>
-          <p:cNvPr id="11" name="Rounded Rectangle 10"/>
+          <p:cNvPr id="12" name="Rounded Rectangle 11"/>
           <p:cNvSpPr/>
           <p:nvPr/>
         </p:nvSpPr>
@@ -3552,7 +3575,7 @@
       </p:sp>
       <p:sp>
         <p:nvSpPr>
-          <p:cNvPr id="12" name="TextBox 11"/>
+          <p:cNvPr id="13" name="TextBox 12"/>
           <p:cNvSpPr txBox="1"/>
           <p:nvPr/>
         </p:nvSpPr>
@@ -3591,7 +3614,7 @@
       </p:sp>
       <p:sp>
         <p:nvSpPr>
-          <p:cNvPr id="13" name="TextBox 12"/>
+          <p:cNvPr id="14" name="TextBox 13"/>
           <p:cNvSpPr txBox="1"/>
           <p:nvPr/>
         </p:nvSpPr>
@@ -3630,7 +3653,7 @@
       </p:sp>
       <p:sp>
         <p:nvSpPr>
-          <p:cNvPr id="14" name="Rounded Rectangle 13"/>
+          <p:cNvPr id="15" name="Rounded Rectangle 14"/>
           <p:cNvSpPr/>
           <p:nvPr/>
         </p:nvSpPr>
@@ -3676,7 +3699,7 @@
       </p:sp>
       <p:sp>
         <p:nvSpPr>
-          <p:cNvPr id="15" name="TextBox 14"/>
+          <p:cNvPr id="16" name="TextBox 15"/>
           <p:cNvSpPr txBox="1"/>
           <p:nvPr/>
         </p:nvSpPr>
@@ -5546,8 +5569,8 @@
         </p:blipFill>
         <p:spPr>
           <a:xfrm>
-            <a:off x="4802428" y="2258568"/>
-            <a:ext cx="6305702" cy="3941063"/>
+            <a:off x="4544568" y="2395842"/>
+            <a:ext cx="6821424" cy="3666515"/>
           </a:xfrm>
           <a:prstGeom prst="rect">
             <a:avLst/>
@@ -6254,8 +6277,8 @@
         </p:blipFill>
         <p:spPr>
           <a:xfrm>
-            <a:off x="4802428" y="2258568"/>
-            <a:ext cx="6305702" cy="3941063"/>
+            <a:off x="4544568" y="2395842"/>
+            <a:ext cx="6821424" cy="3666515"/>
           </a:xfrm>
           <a:prstGeom prst="rect">
             <a:avLst/>
@@ -6962,8 +6985,8 @@
         </p:blipFill>
         <p:spPr>
           <a:xfrm>
-            <a:off x="4802428" y="2258568"/>
-            <a:ext cx="6305702" cy="3941063"/>
+            <a:off x="4544568" y="2395842"/>
+            <a:ext cx="6821424" cy="3666515"/>
           </a:xfrm>
           <a:prstGeom prst="rect">
             <a:avLst/>
